--- a/Experiencia de Aprendizaje 1 - Fundamentos de AI Generativa y Prompt Engineering/Clase 1.3/Clase 1.3.pptx
+++ b/Experiencia de Aprendizaje 1 - Fundamentos de AI Generativa y Prompt Engineering/Clase 1.3/Clase 1.3.pptx
@@ -5,32 +5,33 @@
     <p:sldMasterId id="2147483648" r:id="rId1"/>
   </p:sldMasterIdLst>
   <p:notesMasterIdLst>
-    <p:notesMasterId r:id="rId25"/>
+    <p:notesMasterId r:id="rId26"/>
   </p:notesMasterIdLst>
   <p:sldIdLst>
     <p:sldId id="256" r:id="rId2"/>
-    <p:sldId id="266" r:id="rId3"/>
-    <p:sldId id="275" r:id="rId4"/>
-    <p:sldId id="276" r:id="rId5"/>
-    <p:sldId id="277" r:id="rId6"/>
-    <p:sldId id="278" r:id="rId7"/>
-    <p:sldId id="279" r:id="rId8"/>
-    <p:sldId id="280" r:id="rId9"/>
-    <p:sldId id="281" r:id="rId10"/>
-    <p:sldId id="282" r:id="rId11"/>
-    <p:sldId id="283" r:id="rId12"/>
-    <p:sldId id="284" r:id="rId13"/>
-    <p:sldId id="295" r:id="rId14"/>
-    <p:sldId id="285" r:id="rId15"/>
-    <p:sldId id="286" r:id="rId16"/>
-    <p:sldId id="288" r:id="rId17"/>
-    <p:sldId id="287" r:id="rId18"/>
-    <p:sldId id="289" r:id="rId19"/>
-    <p:sldId id="290" r:id="rId20"/>
-    <p:sldId id="291" r:id="rId21"/>
-    <p:sldId id="292" r:id="rId22"/>
-    <p:sldId id="293" r:id="rId23"/>
-    <p:sldId id="294" r:id="rId24"/>
+    <p:sldId id="296" r:id="rId3"/>
+    <p:sldId id="266" r:id="rId4"/>
+    <p:sldId id="275" r:id="rId5"/>
+    <p:sldId id="276" r:id="rId6"/>
+    <p:sldId id="277" r:id="rId7"/>
+    <p:sldId id="278" r:id="rId8"/>
+    <p:sldId id="279" r:id="rId9"/>
+    <p:sldId id="280" r:id="rId10"/>
+    <p:sldId id="281" r:id="rId11"/>
+    <p:sldId id="282" r:id="rId12"/>
+    <p:sldId id="283" r:id="rId13"/>
+    <p:sldId id="284" r:id="rId14"/>
+    <p:sldId id="295" r:id="rId15"/>
+    <p:sldId id="285" r:id="rId16"/>
+    <p:sldId id="286" r:id="rId17"/>
+    <p:sldId id="288" r:id="rId18"/>
+    <p:sldId id="287" r:id="rId19"/>
+    <p:sldId id="289" r:id="rId20"/>
+    <p:sldId id="290" r:id="rId21"/>
+    <p:sldId id="291" r:id="rId22"/>
+    <p:sldId id="292" r:id="rId23"/>
+    <p:sldId id="293" r:id="rId24"/>
+    <p:sldId id="294" r:id="rId25"/>
   </p:sldIdLst>
   <p:sldSz cx="12192000" cy="6858000"/>
   <p:notesSz cx="6858000" cy="9144000"/>
@@ -231,7 +232,7 @@
           <a:p>
             <a:fld id="{87BDCB0C-69E9-4911-980B-989A824EA717}" type="datetimeFigureOut">
               <a:rPr lang="es-CL" smtClean="0"/>
-              <a:t>20-03-2026</a:t>
+              <a:t>23-03-2026</a:t>
             </a:fld>
             <a:endParaRPr lang="es-CL"/>
           </a:p>
@@ -564,7 +565,7 @@
           <a:p>
             <a:fld id="{2107F482-7FF7-4DD4-AE91-ACA70D5B43D5}" type="slidenum">
               <a:rPr lang="es-CL" smtClean="0"/>
-              <a:t>4</a:t>
+              <a:t>5</a:t>
             </a:fld>
             <a:endParaRPr lang="es-CL"/>
           </a:p>
@@ -672,7 +673,7 @@
           <a:p>
             <a:fld id="{2107F482-7FF7-4DD4-AE91-ACA70D5B43D5}" type="slidenum">
               <a:rPr lang="es-CL" smtClean="0"/>
-              <a:t>13</a:t>
+              <a:t>14</a:t>
             </a:fld>
             <a:endParaRPr lang="es-CL"/>
           </a:p>
@@ -780,7 +781,7 @@
           <a:p>
             <a:fld id="{2107F482-7FF7-4DD4-AE91-ACA70D5B43D5}" type="slidenum">
               <a:rPr lang="es-CL" smtClean="0"/>
-              <a:t>14</a:t>
+              <a:t>15</a:t>
             </a:fld>
             <a:endParaRPr lang="es-CL"/>
           </a:p>
@@ -888,7 +889,7 @@
           <a:p>
             <a:fld id="{2107F482-7FF7-4DD4-AE91-ACA70D5B43D5}" type="slidenum">
               <a:rPr lang="es-CL" smtClean="0"/>
-              <a:t>15</a:t>
+              <a:t>16</a:t>
             </a:fld>
             <a:endParaRPr lang="es-CL"/>
           </a:p>
@@ -996,7 +997,7 @@
           <a:p>
             <a:fld id="{2107F482-7FF7-4DD4-AE91-ACA70D5B43D5}" type="slidenum">
               <a:rPr lang="es-CL" smtClean="0"/>
-              <a:t>16</a:t>
+              <a:t>17</a:t>
             </a:fld>
             <a:endParaRPr lang="es-CL"/>
           </a:p>
@@ -1104,7 +1105,7 @@
           <a:p>
             <a:fld id="{2107F482-7FF7-4DD4-AE91-ACA70D5B43D5}" type="slidenum">
               <a:rPr lang="es-CL" smtClean="0"/>
-              <a:t>17</a:t>
+              <a:t>18</a:t>
             </a:fld>
             <a:endParaRPr lang="es-CL"/>
           </a:p>
@@ -1212,7 +1213,7 @@
           <a:p>
             <a:fld id="{2107F482-7FF7-4DD4-AE91-ACA70D5B43D5}" type="slidenum">
               <a:rPr lang="es-CL" smtClean="0"/>
-              <a:t>18</a:t>
+              <a:t>19</a:t>
             </a:fld>
             <a:endParaRPr lang="es-CL"/>
           </a:p>
@@ -1320,7 +1321,7 @@
           <a:p>
             <a:fld id="{2107F482-7FF7-4DD4-AE91-ACA70D5B43D5}" type="slidenum">
               <a:rPr lang="es-CL" smtClean="0"/>
-              <a:t>19</a:t>
+              <a:t>20</a:t>
             </a:fld>
             <a:endParaRPr lang="es-CL"/>
           </a:p>
@@ -1428,7 +1429,7 @@
           <a:p>
             <a:fld id="{2107F482-7FF7-4DD4-AE91-ACA70D5B43D5}" type="slidenum">
               <a:rPr lang="es-CL" smtClean="0"/>
-              <a:t>20</a:t>
+              <a:t>21</a:t>
             </a:fld>
             <a:endParaRPr lang="es-CL"/>
           </a:p>
@@ -1536,7 +1537,7 @@
           <a:p>
             <a:fld id="{2107F482-7FF7-4DD4-AE91-ACA70D5B43D5}" type="slidenum">
               <a:rPr lang="es-CL" smtClean="0"/>
-              <a:t>21</a:t>
+              <a:t>22</a:t>
             </a:fld>
             <a:endParaRPr lang="es-CL"/>
           </a:p>
@@ -1644,7 +1645,7 @@
           <a:p>
             <a:fld id="{2107F482-7FF7-4DD4-AE91-ACA70D5B43D5}" type="slidenum">
               <a:rPr lang="es-CL" smtClean="0"/>
-              <a:t>22</a:t>
+              <a:t>23</a:t>
             </a:fld>
             <a:endParaRPr lang="es-CL"/>
           </a:p>
@@ -1752,7 +1753,7 @@
           <a:p>
             <a:fld id="{2107F482-7FF7-4DD4-AE91-ACA70D5B43D5}" type="slidenum">
               <a:rPr lang="es-CL" smtClean="0"/>
-              <a:t>5</a:t>
+              <a:t>6</a:t>
             </a:fld>
             <a:endParaRPr lang="es-CL"/>
           </a:p>
@@ -1860,7 +1861,7 @@
           <a:p>
             <a:fld id="{2107F482-7FF7-4DD4-AE91-ACA70D5B43D5}" type="slidenum">
               <a:rPr lang="es-CL" smtClean="0"/>
-              <a:t>23</a:t>
+              <a:t>24</a:t>
             </a:fld>
             <a:endParaRPr lang="es-CL"/>
           </a:p>
@@ -1968,7 +1969,7 @@
           <a:p>
             <a:fld id="{2107F482-7FF7-4DD4-AE91-ACA70D5B43D5}" type="slidenum">
               <a:rPr lang="es-CL" smtClean="0"/>
-              <a:t>6</a:t>
+              <a:t>7</a:t>
             </a:fld>
             <a:endParaRPr lang="es-CL"/>
           </a:p>
@@ -2076,7 +2077,7 @@
           <a:p>
             <a:fld id="{2107F482-7FF7-4DD4-AE91-ACA70D5B43D5}" type="slidenum">
               <a:rPr lang="es-CL" smtClean="0"/>
-              <a:t>7</a:t>
+              <a:t>8</a:t>
             </a:fld>
             <a:endParaRPr lang="es-CL"/>
           </a:p>
@@ -2184,7 +2185,7 @@
           <a:p>
             <a:fld id="{2107F482-7FF7-4DD4-AE91-ACA70D5B43D5}" type="slidenum">
               <a:rPr lang="es-CL" smtClean="0"/>
-              <a:t>8</a:t>
+              <a:t>9</a:t>
             </a:fld>
             <a:endParaRPr lang="es-CL"/>
           </a:p>
@@ -2292,7 +2293,7 @@
           <a:p>
             <a:fld id="{2107F482-7FF7-4DD4-AE91-ACA70D5B43D5}" type="slidenum">
               <a:rPr lang="es-CL" smtClean="0"/>
-              <a:t>9</a:t>
+              <a:t>10</a:t>
             </a:fld>
             <a:endParaRPr lang="es-CL"/>
           </a:p>
@@ -2400,7 +2401,7 @@
           <a:p>
             <a:fld id="{2107F482-7FF7-4DD4-AE91-ACA70D5B43D5}" type="slidenum">
               <a:rPr lang="es-CL" smtClean="0"/>
-              <a:t>10</a:t>
+              <a:t>11</a:t>
             </a:fld>
             <a:endParaRPr lang="es-CL"/>
           </a:p>
@@ -2508,7 +2509,7 @@
           <a:p>
             <a:fld id="{2107F482-7FF7-4DD4-AE91-ACA70D5B43D5}" type="slidenum">
               <a:rPr lang="es-CL" smtClean="0"/>
-              <a:t>11</a:t>
+              <a:t>12</a:t>
             </a:fld>
             <a:endParaRPr lang="es-CL"/>
           </a:p>
@@ -2616,7 +2617,7 @@
           <a:p>
             <a:fld id="{2107F482-7FF7-4DD4-AE91-ACA70D5B43D5}" type="slidenum">
               <a:rPr lang="es-CL" smtClean="0"/>
-              <a:t>12</a:t>
+              <a:t>13</a:t>
             </a:fld>
             <a:endParaRPr lang="es-CL"/>
           </a:p>
@@ -2784,7 +2785,7 @@
           <a:p>
             <a:fld id="{E8BDA46D-A1A7-4D05-A86A-5A57D57622A5}" type="datetimeFigureOut">
               <a:rPr lang="es-CL" smtClean="0"/>
-              <a:t>20-03-2026</a:t>
+              <a:t>23-03-2026</a:t>
             </a:fld>
             <a:endParaRPr lang="es-CL"/>
           </a:p>
@@ -2984,7 +2985,7 @@
           <a:p>
             <a:fld id="{E8BDA46D-A1A7-4D05-A86A-5A57D57622A5}" type="datetimeFigureOut">
               <a:rPr lang="es-CL" smtClean="0"/>
-              <a:t>20-03-2026</a:t>
+              <a:t>23-03-2026</a:t>
             </a:fld>
             <a:endParaRPr lang="es-CL"/>
           </a:p>
@@ -3194,7 +3195,7 @@
           <a:p>
             <a:fld id="{E8BDA46D-A1A7-4D05-A86A-5A57D57622A5}" type="datetimeFigureOut">
               <a:rPr lang="es-CL" smtClean="0"/>
-              <a:t>20-03-2026</a:t>
+              <a:t>23-03-2026</a:t>
             </a:fld>
             <a:endParaRPr lang="es-CL"/>
           </a:p>
@@ -3394,7 +3395,7 @@
           <a:p>
             <a:fld id="{E8BDA46D-A1A7-4D05-A86A-5A57D57622A5}" type="datetimeFigureOut">
               <a:rPr lang="es-CL" smtClean="0"/>
-              <a:t>20-03-2026</a:t>
+              <a:t>23-03-2026</a:t>
             </a:fld>
             <a:endParaRPr lang="es-CL"/>
           </a:p>
@@ -3670,7 +3671,7 @@
           <a:p>
             <a:fld id="{E8BDA46D-A1A7-4D05-A86A-5A57D57622A5}" type="datetimeFigureOut">
               <a:rPr lang="es-CL" smtClean="0"/>
-              <a:t>20-03-2026</a:t>
+              <a:t>23-03-2026</a:t>
             </a:fld>
             <a:endParaRPr lang="es-CL"/>
           </a:p>
@@ -3938,7 +3939,7 @@
           <a:p>
             <a:fld id="{E8BDA46D-A1A7-4D05-A86A-5A57D57622A5}" type="datetimeFigureOut">
               <a:rPr lang="es-CL" smtClean="0"/>
-              <a:t>20-03-2026</a:t>
+              <a:t>23-03-2026</a:t>
             </a:fld>
             <a:endParaRPr lang="es-CL"/>
           </a:p>
@@ -4353,7 +4354,7 @@
           <a:p>
             <a:fld id="{E8BDA46D-A1A7-4D05-A86A-5A57D57622A5}" type="datetimeFigureOut">
               <a:rPr lang="es-CL" smtClean="0"/>
-              <a:t>20-03-2026</a:t>
+              <a:t>23-03-2026</a:t>
             </a:fld>
             <a:endParaRPr lang="es-CL"/>
           </a:p>
@@ -4495,7 +4496,7 @@
           <a:p>
             <a:fld id="{E8BDA46D-A1A7-4D05-A86A-5A57D57622A5}" type="datetimeFigureOut">
               <a:rPr lang="es-CL" smtClean="0"/>
-              <a:t>20-03-2026</a:t>
+              <a:t>23-03-2026</a:t>
             </a:fld>
             <a:endParaRPr lang="es-CL"/>
           </a:p>
@@ -4608,7 +4609,7 @@
           <a:p>
             <a:fld id="{E8BDA46D-A1A7-4D05-A86A-5A57D57622A5}" type="datetimeFigureOut">
               <a:rPr lang="es-CL" smtClean="0"/>
-              <a:t>20-03-2026</a:t>
+              <a:t>23-03-2026</a:t>
             </a:fld>
             <a:endParaRPr lang="es-CL"/>
           </a:p>
@@ -4921,7 +4922,7 @@
           <a:p>
             <a:fld id="{E8BDA46D-A1A7-4D05-A86A-5A57D57622A5}" type="datetimeFigureOut">
               <a:rPr lang="es-CL" smtClean="0"/>
-              <a:t>20-03-2026</a:t>
+              <a:t>23-03-2026</a:t>
             </a:fld>
             <a:endParaRPr lang="es-CL"/>
           </a:p>
@@ -5210,7 +5211,7 @@
           <a:p>
             <a:fld id="{E8BDA46D-A1A7-4D05-A86A-5A57D57622A5}" type="datetimeFigureOut">
               <a:rPr lang="es-CL" smtClean="0"/>
-              <a:t>20-03-2026</a:t>
+              <a:t>23-03-2026</a:t>
             </a:fld>
             <a:endParaRPr lang="es-CL"/>
           </a:p>
@@ -5453,7 +5454,7 @@
           <a:p>
             <a:fld id="{E8BDA46D-A1A7-4D05-A86A-5A57D57622A5}" type="datetimeFigureOut">
               <a:rPr lang="es-CL" smtClean="0"/>
-              <a:t>20-03-2026</a:t>
+              <a:t>23-03-2026</a:t>
             </a:fld>
             <a:endParaRPr lang="es-CL"/>
           </a:p>
@@ -6217,6 +6218,310 @@
         <p:cNvPr id="1" name="">
           <a:extLst>
             <a:ext uri="{FF2B5EF4-FFF2-40B4-BE49-F238E27FC236}">
+              <a16:creationId xmlns:a16="http://schemas.microsoft.com/office/drawing/2014/main" id="{AEE4816B-775E-6C7A-EAC8-78523DF35E37}"/>
+            </a:ext>
+          </a:extLst>
+        </p:cNvPr>
+        <p:cNvGrpSpPr/>
+        <p:nvPr/>
+      </p:nvGrpSpPr>
+      <p:grpSpPr>
+        <a:xfrm>
+          <a:off x="0" y="0"/>
+          <a:ext cx="0" cy="0"/>
+          <a:chOff x="0" y="0"/>
+          <a:chExt cx="0" cy="0"/>
+        </a:xfrm>
+      </p:grpSpPr>
+      <p:sp>
+        <p:nvSpPr>
+          <p:cNvPr id="2" name="Título 1">
+            <a:extLst>
+              <a:ext uri="{FF2B5EF4-FFF2-40B4-BE49-F238E27FC236}">
+                <a16:creationId xmlns:a16="http://schemas.microsoft.com/office/drawing/2014/main" id="{115526D0-1CBE-5F70-4334-F5EDB325A2A6}"/>
+              </a:ext>
+            </a:extLst>
+          </p:cNvPr>
+          <p:cNvSpPr>
+            <a:spLocks noGrp="1"/>
+          </p:cNvSpPr>
+          <p:nvPr>
+            <p:ph type="title"/>
+          </p:nvPr>
+        </p:nvSpPr>
+        <p:spPr>
+          <a:xfrm>
+            <a:off x="620313" y="193100"/>
+            <a:ext cx="10515600" cy="1325563"/>
+          </a:xfrm>
+        </p:spPr>
+        <p:txBody>
+          <a:bodyPr>
+            <a:noAutofit/>
+          </a:bodyPr>
+          <a:lstStyle/>
+          <a:p>
+            <a:r>
+              <a:rPr lang="es-MX" sz="3600" b="1" i="1" dirty="0"/>
+              <a:t>¿Qué pasaría si solo usamos </a:t>
+            </a:r>
+            <a:r>
+              <a:rPr lang="es-MX" sz="3600" b="1" i="1" dirty="0" err="1"/>
+              <a:t>term</a:t>
+            </a:r>
+            <a:r>
+              <a:rPr lang="es-MX" sz="3600" b="1" i="1" dirty="0"/>
+              <a:t> base?</a:t>
+            </a:r>
+            <a:endParaRPr lang="es-CL" sz="3600" b="1" i="1" dirty="0"/>
+          </a:p>
+        </p:txBody>
+      </p:sp>
+      <p:pic>
+        <p:nvPicPr>
+          <p:cNvPr id="4" name="Picture 2" descr="Duoc UC - Learn Chile">
+            <a:extLst>
+              <a:ext uri="{FF2B5EF4-FFF2-40B4-BE49-F238E27FC236}">
+                <a16:creationId xmlns:a16="http://schemas.microsoft.com/office/drawing/2014/main" id="{E7182D9E-587C-E442-9CD7-8901BA3B424C}"/>
+              </a:ext>
+            </a:extLst>
+          </p:cNvPr>
+          <p:cNvPicPr>
+            <a:picLocks noChangeAspect="1" noChangeArrowheads="1"/>
+          </p:cNvPicPr>
+          <p:nvPr/>
+        </p:nvPicPr>
+        <p:blipFill>
+          <a:blip r:embed="rId3">
+            <a:extLst>
+              <a:ext uri="{28A0092B-C50C-407E-A947-70E740481C1C}">
+                <a14:useLocalDpi xmlns:a14="http://schemas.microsoft.com/office/drawing/2010/main" val="0"/>
+              </a:ext>
+            </a:extLst>
+          </a:blip>
+          <a:srcRect/>
+          <a:stretch>
+            <a:fillRect/>
+          </a:stretch>
+        </p:blipFill>
+        <p:spPr bwMode="auto">
+          <a:xfrm>
+            <a:off x="11135913" y="30480"/>
+            <a:ext cx="974807" cy="825402"/>
+          </a:xfrm>
+          <a:prstGeom prst="rect">
+            <a:avLst/>
+          </a:prstGeom>
+          <a:noFill/>
+          <a:extLst>
+            <a:ext uri="{909E8E84-426E-40DD-AFC4-6F175D3DCCD1}">
+              <a14:hiddenFill xmlns:a14="http://schemas.microsoft.com/office/drawing/2010/main">
+                <a:solidFill>
+                  <a:srgbClr val="FFFFFF"/>
+                </a:solidFill>
+              </a14:hiddenFill>
+            </a:ext>
+          </a:extLst>
+        </p:spPr>
+      </p:pic>
+      <p:pic>
+        <p:nvPicPr>
+          <p:cNvPr id="3" name="Gráfico 2" descr="Perfil de hombre">
+            <a:extLst>
+              <a:ext uri="{FF2B5EF4-FFF2-40B4-BE49-F238E27FC236}">
+                <a16:creationId xmlns:a16="http://schemas.microsoft.com/office/drawing/2014/main" id="{E89C2753-8B47-1868-1B6A-719CCA43DFB7}"/>
+              </a:ext>
+            </a:extLst>
+          </p:cNvPr>
+          <p:cNvPicPr>
+            <a:picLocks noChangeAspect="1"/>
+          </p:cNvPicPr>
+          <p:nvPr/>
+        </p:nvPicPr>
+        <p:blipFill>
+          <a:blip r:embed="rId4">
+            <a:extLst>
+              <a:ext uri="{96DAC541-7B7A-43D3-8B79-37D633B846F1}">
+                <asvg:svgBlip xmlns:asvg="http://schemas.microsoft.com/office/drawing/2016/SVG/main" r:embed="rId5"/>
+              </a:ext>
+            </a:extLst>
+          </a:blip>
+          <a:stretch>
+            <a:fillRect/>
+          </a:stretch>
+        </p:blipFill>
+        <p:spPr>
+          <a:xfrm>
+            <a:off x="2860080" y="2986949"/>
+            <a:ext cx="914400" cy="914400"/>
+          </a:xfrm>
+          <a:prstGeom prst="rect">
+            <a:avLst/>
+          </a:prstGeom>
+        </p:spPr>
+      </p:pic>
+      <p:sp>
+        <p:nvSpPr>
+          <p:cNvPr id="5" name="CuadroTexto 4">
+            <a:extLst>
+              <a:ext uri="{FF2B5EF4-FFF2-40B4-BE49-F238E27FC236}">
+                <a16:creationId xmlns:a16="http://schemas.microsoft.com/office/drawing/2014/main" id="{345B2BE2-5D0A-636D-9EEE-F0A9FA261E8E}"/>
+              </a:ext>
+            </a:extLst>
+          </p:cNvPr>
+          <p:cNvSpPr txBox="1"/>
+          <p:nvPr/>
+        </p:nvSpPr>
+        <p:spPr>
+          <a:xfrm>
+            <a:off x="1643229" y="2802283"/>
+            <a:ext cx="6097712" cy="369332"/>
+          </a:xfrm>
+          <a:prstGeom prst="rect">
+            <a:avLst/>
+          </a:prstGeom>
+          <a:noFill/>
+        </p:spPr>
+        <p:txBody>
+          <a:bodyPr wrap="square">
+            <a:spAutoFit/>
+          </a:bodyPr>
+          <a:lstStyle/>
+          <a:p>
+            <a:pPr algn="ctr"/>
+            <a:r>
+              <a:rPr lang="es-MX" b="1" i="1" dirty="0"/>
+              <a:t>Consulta</a:t>
+            </a:r>
+            <a:endParaRPr lang="es-CL" b="1" i="1" dirty="0">
+              <a:solidFill>
+                <a:schemeClr val="tx1"/>
+              </a:solidFill>
+            </a:endParaRPr>
+          </a:p>
+        </p:txBody>
+      </p:sp>
+      <p:cxnSp>
+        <p:nvCxnSpPr>
+          <p:cNvPr id="6" name="Conector recto de flecha 5">
+            <a:extLst>
+              <a:ext uri="{FF2B5EF4-FFF2-40B4-BE49-F238E27FC236}">
+                <a16:creationId xmlns:a16="http://schemas.microsoft.com/office/drawing/2014/main" id="{9F2FF5AB-930C-3D9B-1049-0A25B96DF560}"/>
+              </a:ext>
+            </a:extLst>
+          </p:cNvPr>
+          <p:cNvCxnSpPr/>
+          <p:nvPr/>
+        </p:nvCxnSpPr>
+        <p:spPr>
+          <a:xfrm>
+            <a:off x="4000511" y="3421491"/>
+            <a:ext cx="1588630" cy="0"/>
+          </a:xfrm>
+          <a:prstGeom prst="straightConnector1">
+            <a:avLst/>
+          </a:prstGeom>
+          <a:ln>
+            <a:solidFill>
+              <a:schemeClr val="tx1"/>
+            </a:solidFill>
+            <a:tailEnd type="triangle"/>
+          </a:ln>
+        </p:spPr>
+        <p:style>
+          <a:lnRef idx="1">
+            <a:schemeClr val="accent1"/>
+          </a:lnRef>
+          <a:fillRef idx="0">
+            <a:schemeClr val="accent1"/>
+          </a:fillRef>
+          <a:effectRef idx="0">
+            <a:schemeClr val="accent1"/>
+          </a:effectRef>
+          <a:fontRef idx="minor">
+            <a:schemeClr val="tx1"/>
+          </a:fontRef>
+        </p:style>
+      </p:cxnSp>
+      <p:sp>
+        <p:nvSpPr>
+          <p:cNvPr id="8" name="Cilindro 7">
+            <a:extLst>
+              <a:ext uri="{FF2B5EF4-FFF2-40B4-BE49-F238E27FC236}">
+                <a16:creationId xmlns:a16="http://schemas.microsoft.com/office/drawing/2014/main" id="{C396DD47-B68D-1097-3688-56489898C3E4}"/>
+              </a:ext>
+            </a:extLst>
+          </p:cNvPr>
+          <p:cNvSpPr/>
+          <p:nvPr/>
+        </p:nvSpPr>
+        <p:spPr>
+          <a:xfrm>
+            <a:off x="5878113" y="2650929"/>
+            <a:ext cx="1489753" cy="1541124"/>
+          </a:xfrm>
+          <a:prstGeom prst="can">
+            <a:avLst/>
+          </a:prstGeom>
+        </p:spPr>
+        <p:style>
+          <a:lnRef idx="2">
+            <a:schemeClr val="accent1">
+              <a:shade val="15000"/>
+            </a:schemeClr>
+          </a:lnRef>
+          <a:fillRef idx="1">
+            <a:schemeClr val="accent1"/>
+          </a:fillRef>
+          <a:effectRef idx="0">
+            <a:schemeClr val="accent1"/>
+          </a:effectRef>
+          <a:fontRef idx="minor">
+            <a:schemeClr val="lt1"/>
+          </a:fontRef>
+        </p:style>
+        <p:txBody>
+          <a:bodyPr rtlCol="0" anchor="ctr"/>
+          <a:lstStyle/>
+          <a:p>
+            <a:pPr algn="ctr"/>
+            <a:r>
+              <a:rPr lang="es-MX" dirty="0" err="1"/>
+              <a:t>External</a:t>
+            </a:r>
+            <a:r>
+              <a:rPr lang="es-MX" dirty="0"/>
+              <a:t> </a:t>
+            </a:r>
+            <a:r>
+              <a:rPr lang="es-MX" dirty="0" err="1"/>
+              <a:t>Memory</a:t>
+            </a:r>
+            <a:endParaRPr lang="es-CL" dirty="0"/>
+          </a:p>
+        </p:txBody>
+      </p:sp>
+    </p:spTree>
+    <p:extLst>
+      <p:ext uri="{BB962C8B-B14F-4D97-AF65-F5344CB8AC3E}">
+        <p14:creationId xmlns:p14="http://schemas.microsoft.com/office/powerpoint/2010/main" val="61365135"/>
+      </p:ext>
+    </p:extLst>
+  </p:cSld>
+  <p:clrMapOvr>
+    <a:masterClrMapping/>
+  </p:clrMapOvr>
+</p:sld>
+</file>
+
+<file path=ppt/slides/slide11.xml><?xml version="1.0" encoding="utf-8"?>
+<p:sld xmlns:a="http://schemas.openxmlformats.org/drawingml/2006/main" xmlns:r="http://schemas.openxmlformats.org/officeDocument/2006/relationships" xmlns:p="http://schemas.openxmlformats.org/presentationml/2006/main">
+  <p:cSld>
+    <p:spTree>
+      <p:nvGrpSpPr>
+        <p:cNvPr id="1" name="">
+          <a:extLst>
+            <a:ext uri="{FF2B5EF4-FFF2-40B4-BE49-F238E27FC236}">
               <a16:creationId xmlns:a16="http://schemas.microsoft.com/office/drawing/2014/main" id="{E086072B-5C02-0100-B3CD-7AA028B7300F}"/>
             </a:ext>
           </a:extLst>
@@ -6664,7 +6969,7 @@
 </p:sld>
 </file>
 
-<file path=ppt/slides/slide11.xml><?xml version="1.0" encoding="utf-8"?>
+<file path=ppt/slides/slide12.xml><?xml version="1.0" encoding="utf-8"?>
 <p:sld xmlns:a="http://schemas.openxmlformats.org/drawingml/2006/main" xmlns:r="http://schemas.openxmlformats.org/officeDocument/2006/relationships" xmlns:p="http://schemas.openxmlformats.org/presentationml/2006/main">
   <p:cSld>
     <p:spTree>
@@ -7210,7 +7515,7 @@
 </p:sld>
 </file>
 
-<file path=ppt/slides/slide12.xml><?xml version="1.0" encoding="utf-8"?>
+<file path=ppt/slides/slide13.xml><?xml version="1.0" encoding="utf-8"?>
 <p:sld xmlns:a="http://schemas.openxmlformats.org/drawingml/2006/main" xmlns:r="http://schemas.openxmlformats.org/officeDocument/2006/relationships" xmlns:p="http://schemas.openxmlformats.org/presentationml/2006/main">
   <p:cSld>
     <p:spTree>
@@ -7857,7 +8162,7 @@
 </p:sld>
 </file>
 
-<file path=ppt/slides/slide13.xml><?xml version="1.0" encoding="utf-8"?>
+<file path=ppt/slides/slide14.xml><?xml version="1.0" encoding="utf-8"?>
 <p:sld xmlns:a="http://schemas.openxmlformats.org/drawingml/2006/main" xmlns:r="http://schemas.openxmlformats.org/officeDocument/2006/relationships" xmlns:p="http://schemas.openxmlformats.org/presentationml/2006/main">
   <p:cSld>
     <p:spTree>
@@ -8535,7 +8840,7 @@
 </p:sld>
 </file>
 
-<file path=ppt/slides/slide14.xml><?xml version="1.0" encoding="utf-8"?>
+<file path=ppt/slides/slide15.xml><?xml version="1.0" encoding="utf-8"?>
 <p:sld xmlns:a="http://schemas.openxmlformats.org/drawingml/2006/main" xmlns:r="http://schemas.openxmlformats.org/officeDocument/2006/relationships" xmlns:p="http://schemas.openxmlformats.org/presentationml/2006/main">
   <p:cSld>
     <p:spTree>
@@ -9765,7 +10070,7 @@
 </p:sld>
 </file>
 
-<file path=ppt/slides/slide15.xml><?xml version="1.0" encoding="utf-8"?>
+<file path=ppt/slides/slide16.xml><?xml version="1.0" encoding="utf-8"?>
 <p:sld xmlns:a="http://schemas.openxmlformats.org/drawingml/2006/main" xmlns:r="http://schemas.openxmlformats.org/officeDocument/2006/relationships" xmlns:p="http://schemas.openxmlformats.org/presentationml/2006/main">
   <p:cSld>
     <p:spTree>
@@ -10109,7 +10414,7 @@
 </p:sld>
 </file>
 
-<file path=ppt/slides/slide16.xml><?xml version="1.0" encoding="utf-8"?>
+<file path=ppt/slides/slide17.xml><?xml version="1.0" encoding="utf-8"?>
 <p:sld xmlns:a="http://schemas.openxmlformats.org/drawingml/2006/main" xmlns:r="http://schemas.openxmlformats.org/officeDocument/2006/relationships" xmlns:p="http://schemas.openxmlformats.org/presentationml/2006/main">
   <p:cSld>
     <p:spTree>
@@ -10335,7 +10640,7 @@
 </p:sld>
 </file>
 
-<file path=ppt/slides/slide17.xml><?xml version="1.0" encoding="utf-8"?>
+<file path=ppt/slides/slide18.xml><?xml version="1.0" encoding="utf-8"?>
 <p:sld xmlns:a="http://schemas.openxmlformats.org/drawingml/2006/main" xmlns:r="http://schemas.openxmlformats.org/officeDocument/2006/relationships" xmlns:p="http://schemas.openxmlformats.org/presentationml/2006/main">
   <p:cSld>
     <p:spTree>
@@ -10629,7 +10934,7 @@
 </p:sld>
 </file>
 
-<file path=ppt/slides/slide18.xml><?xml version="1.0" encoding="utf-8"?>
+<file path=ppt/slides/slide19.xml><?xml version="1.0" encoding="utf-8"?>
 <p:sld xmlns:a="http://schemas.openxmlformats.org/drawingml/2006/main" xmlns:r="http://schemas.openxmlformats.org/officeDocument/2006/relationships" xmlns:p="http://schemas.openxmlformats.org/presentationml/2006/main">
   <p:cSld>
     <p:spTree>
@@ -10748,7 +11053,384 @@
 </p:sld>
 </file>
 
-<file path=ppt/slides/slide19.xml><?xml version="1.0" encoding="utf-8"?>
+<file path=ppt/slides/slide2.xml><?xml version="1.0" encoding="utf-8"?>
+<p:sld xmlns:a="http://schemas.openxmlformats.org/drawingml/2006/main" xmlns:r="http://schemas.openxmlformats.org/officeDocument/2006/relationships" xmlns:p="http://schemas.openxmlformats.org/presentationml/2006/main">
+  <p:cSld>
+    <p:spTree>
+      <p:nvGrpSpPr>
+        <p:cNvPr id="1" name="">
+          <a:extLst>
+            <a:ext uri="{FF2B5EF4-FFF2-40B4-BE49-F238E27FC236}">
+              <a16:creationId xmlns:a16="http://schemas.microsoft.com/office/drawing/2014/main" id="{85990ABC-D647-E87E-AAE0-D524378C1857}"/>
+            </a:ext>
+          </a:extLst>
+        </p:cNvPr>
+        <p:cNvGrpSpPr/>
+        <p:nvPr/>
+      </p:nvGrpSpPr>
+      <p:grpSpPr>
+        <a:xfrm>
+          <a:off x="0" y="0"/>
+          <a:ext cx="0" cy="0"/>
+          <a:chOff x="0" y="0"/>
+          <a:chExt cx="0" cy="0"/>
+        </a:xfrm>
+      </p:grpSpPr>
+      <p:pic>
+        <p:nvPicPr>
+          <p:cNvPr id="1026" name="Picture 2" descr="Duoc UC - Learn Chile">
+            <a:extLst>
+              <a:ext uri="{FF2B5EF4-FFF2-40B4-BE49-F238E27FC236}">
+                <a16:creationId xmlns:a16="http://schemas.microsoft.com/office/drawing/2014/main" id="{4C3BE5F9-27B6-33F5-1026-80A56F6FFB31}"/>
+              </a:ext>
+            </a:extLst>
+          </p:cNvPr>
+          <p:cNvPicPr>
+            <a:picLocks noChangeAspect="1" noChangeArrowheads="1"/>
+          </p:cNvPicPr>
+          <p:nvPr/>
+        </p:nvPicPr>
+        <p:blipFill>
+          <a:blip r:embed="rId2">
+            <a:extLst>
+              <a:ext uri="{28A0092B-C50C-407E-A947-70E740481C1C}">
+                <a14:useLocalDpi xmlns:a14="http://schemas.microsoft.com/office/drawing/2010/main" val="0"/>
+              </a:ext>
+            </a:extLst>
+          </a:blip>
+          <a:srcRect/>
+          <a:stretch>
+            <a:fillRect/>
+          </a:stretch>
+        </p:blipFill>
+        <p:spPr bwMode="auto">
+          <a:xfrm>
+            <a:off x="11135913" y="30480"/>
+            <a:ext cx="974807" cy="825402"/>
+          </a:xfrm>
+          <a:prstGeom prst="rect">
+            <a:avLst/>
+          </a:prstGeom>
+          <a:noFill/>
+          <a:extLst>
+            <a:ext uri="{909E8E84-426E-40DD-AFC4-6F175D3DCCD1}">
+              <a14:hiddenFill xmlns:a14="http://schemas.microsoft.com/office/drawing/2010/main">
+                <a:solidFill>
+                  <a:srgbClr val="FFFFFF"/>
+                </a:solidFill>
+              </a14:hiddenFill>
+            </a:ext>
+          </a:extLst>
+        </p:spPr>
+      </p:pic>
+      <p:sp>
+        <p:nvSpPr>
+          <p:cNvPr id="4" name="Subtítulo 2">
+            <a:extLst>
+              <a:ext uri="{FF2B5EF4-FFF2-40B4-BE49-F238E27FC236}">
+                <a16:creationId xmlns:a16="http://schemas.microsoft.com/office/drawing/2014/main" id="{FF652441-FFCB-0E72-804E-1A56DB685153}"/>
+              </a:ext>
+            </a:extLst>
+          </p:cNvPr>
+          <p:cNvSpPr txBox="1">
+            <a:spLocks/>
+          </p:cNvSpPr>
+          <p:nvPr/>
+        </p:nvSpPr>
+        <p:spPr>
+          <a:xfrm>
+            <a:off x="5345302" y="5971981"/>
+            <a:ext cx="2585194" cy="675639"/>
+          </a:xfrm>
+          <a:prstGeom prst="rect">
+            <a:avLst/>
+          </a:prstGeom>
+        </p:spPr>
+        <p:txBody>
+          <a:bodyPr vert="horz" lIns="91440" tIns="45720" rIns="91440" bIns="45720" rtlCol="0">
+            <a:normAutofit/>
+          </a:bodyPr>
+          <a:lstStyle>
+            <a:lvl1pPr marL="0" indent="0" algn="ctr" defTabSz="914400" rtl="0" eaLnBrk="1" latinLnBrk="0" hangingPunct="1">
+              <a:lnSpc>
+                <a:spcPct val="90000"/>
+              </a:lnSpc>
+              <a:spcBef>
+                <a:spcPts val="1000"/>
+              </a:spcBef>
+              <a:buFont typeface="Arial" panose="020B0604020202020204" pitchFamily="34" charset="0"/>
+              <a:buNone/>
+              <a:defRPr sz="2400" kern="1200">
+                <a:solidFill>
+                  <a:schemeClr val="tx1"/>
+                </a:solidFill>
+                <a:latin typeface="+mn-lt"/>
+                <a:ea typeface="+mn-ea"/>
+                <a:cs typeface="+mn-cs"/>
+              </a:defRPr>
+            </a:lvl1pPr>
+            <a:lvl2pPr marL="457200" indent="0" algn="ctr" defTabSz="914400" rtl="0" eaLnBrk="1" latinLnBrk="0" hangingPunct="1">
+              <a:lnSpc>
+                <a:spcPct val="90000"/>
+              </a:lnSpc>
+              <a:spcBef>
+                <a:spcPts val="500"/>
+              </a:spcBef>
+              <a:buFont typeface="Arial" panose="020B0604020202020204" pitchFamily="34" charset="0"/>
+              <a:buNone/>
+              <a:defRPr sz="2000" kern="1200">
+                <a:solidFill>
+                  <a:schemeClr val="tx1"/>
+                </a:solidFill>
+                <a:latin typeface="+mn-lt"/>
+                <a:ea typeface="+mn-ea"/>
+                <a:cs typeface="+mn-cs"/>
+              </a:defRPr>
+            </a:lvl2pPr>
+            <a:lvl3pPr marL="914400" indent="0" algn="ctr" defTabSz="914400" rtl="0" eaLnBrk="1" latinLnBrk="0" hangingPunct="1">
+              <a:lnSpc>
+                <a:spcPct val="90000"/>
+              </a:lnSpc>
+              <a:spcBef>
+                <a:spcPts val="500"/>
+              </a:spcBef>
+              <a:buFont typeface="Arial" panose="020B0604020202020204" pitchFamily="34" charset="0"/>
+              <a:buNone/>
+              <a:defRPr sz="1800" kern="1200">
+                <a:solidFill>
+                  <a:schemeClr val="tx1"/>
+                </a:solidFill>
+                <a:latin typeface="+mn-lt"/>
+                <a:ea typeface="+mn-ea"/>
+                <a:cs typeface="+mn-cs"/>
+              </a:defRPr>
+            </a:lvl3pPr>
+            <a:lvl4pPr marL="1371600" indent="0" algn="ctr" defTabSz="914400" rtl="0" eaLnBrk="1" latinLnBrk="0" hangingPunct="1">
+              <a:lnSpc>
+                <a:spcPct val="90000"/>
+              </a:lnSpc>
+              <a:spcBef>
+                <a:spcPts val="500"/>
+              </a:spcBef>
+              <a:buFont typeface="Arial" panose="020B0604020202020204" pitchFamily="34" charset="0"/>
+              <a:buNone/>
+              <a:defRPr sz="1600" kern="1200">
+                <a:solidFill>
+                  <a:schemeClr val="tx1"/>
+                </a:solidFill>
+                <a:latin typeface="+mn-lt"/>
+                <a:ea typeface="+mn-ea"/>
+                <a:cs typeface="+mn-cs"/>
+              </a:defRPr>
+            </a:lvl4pPr>
+            <a:lvl5pPr marL="1828800" indent="0" algn="ctr" defTabSz="914400" rtl="0" eaLnBrk="1" latinLnBrk="0" hangingPunct="1">
+              <a:lnSpc>
+                <a:spcPct val="90000"/>
+              </a:lnSpc>
+              <a:spcBef>
+                <a:spcPts val="500"/>
+              </a:spcBef>
+              <a:buFont typeface="Arial" panose="020B0604020202020204" pitchFamily="34" charset="0"/>
+              <a:buNone/>
+              <a:defRPr sz="1600" kern="1200">
+                <a:solidFill>
+                  <a:schemeClr val="tx1"/>
+                </a:solidFill>
+                <a:latin typeface="+mn-lt"/>
+                <a:ea typeface="+mn-ea"/>
+                <a:cs typeface="+mn-cs"/>
+              </a:defRPr>
+            </a:lvl5pPr>
+            <a:lvl6pPr marL="2286000" indent="0" algn="ctr" defTabSz="914400" rtl="0" eaLnBrk="1" latinLnBrk="0" hangingPunct="1">
+              <a:lnSpc>
+                <a:spcPct val="90000"/>
+              </a:lnSpc>
+              <a:spcBef>
+                <a:spcPts val="500"/>
+              </a:spcBef>
+              <a:buFont typeface="Arial" panose="020B0604020202020204" pitchFamily="34" charset="0"/>
+              <a:buNone/>
+              <a:defRPr sz="1600" kern="1200">
+                <a:solidFill>
+                  <a:schemeClr val="tx1"/>
+                </a:solidFill>
+                <a:latin typeface="+mn-lt"/>
+                <a:ea typeface="+mn-ea"/>
+                <a:cs typeface="+mn-cs"/>
+              </a:defRPr>
+            </a:lvl6pPr>
+            <a:lvl7pPr marL="2743200" indent="0" algn="ctr" defTabSz="914400" rtl="0" eaLnBrk="1" latinLnBrk="0" hangingPunct="1">
+              <a:lnSpc>
+                <a:spcPct val="90000"/>
+              </a:lnSpc>
+              <a:spcBef>
+                <a:spcPts val="500"/>
+              </a:spcBef>
+              <a:buFont typeface="Arial" panose="020B0604020202020204" pitchFamily="34" charset="0"/>
+              <a:buNone/>
+              <a:defRPr sz="1600" kern="1200">
+                <a:solidFill>
+                  <a:schemeClr val="tx1"/>
+                </a:solidFill>
+                <a:latin typeface="+mn-lt"/>
+                <a:ea typeface="+mn-ea"/>
+                <a:cs typeface="+mn-cs"/>
+              </a:defRPr>
+            </a:lvl7pPr>
+            <a:lvl8pPr marL="3200400" indent="0" algn="ctr" defTabSz="914400" rtl="0" eaLnBrk="1" latinLnBrk="0" hangingPunct="1">
+              <a:lnSpc>
+                <a:spcPct val="90000"/>
+              </a:lnSpc>
+              <a:spcBef>
+                <a:spcPts val="500"/>
+              </a:spcBef>
+              <a:buFont typeface="Arial" panose="020B0604020202020204" pitchFamily="34" charset="0"/>
+              <a:buNone/>
+              <a:defRPr sz="1600" kern="1200">
+                <a:solidFill>
+                  <a:schemeClr val="tx1"/>
+                </a:solidFill>
+                <a:latin typeface="+mn-lt"/>
+                <a:ea typeface="+mn-ea"/>
+                <a:cs typeface="+mn-cs"/>
+              </a:defRPr>
+            </a:lvl8pPr>
+            <a:lvl9pPr marL="3657600" indent="0" algn="ctr" defTabSz="914400" rtl="0" eaLnBrk="1" latinLnBrk="0" hangingPunct="1">
+              <a:lnSpc>
+                <a:spcPct val="90000"/>
+              </a:lnSpc>
+              <a:spcBef>
+                <a:spcPts val="500"/>
+              </a:spcBef>
+              <a:buFont typeface="Arial" panose="020B0604020202020204" pitchFamily="34" charset="0"/>
+              <a:buNone/>
+              <a:defRPr sz="1600" kern="1200">
+                <a:solidFill>
+                  <a:schemeClr val="tx1"/>
+                </a:solidFill>
+                <a:latin typeface="+mn-lt"/>
+                <a:ea typeface="+mn-ea"/>
+                <a:cs typeface="+mn-cs"/>
+              </a:defRPr>
+            </a:lvl9pPr>
+          </a:lstStyle>
+          <a:p>
+            <a:pPr algn="l"/>
+            <a:r>
+              <a:rPr lang="es-MX" sz="1800" i="1" dirty="0"/>
+              <a:t>Semestre 2026-1</a:t>
+            </a:r>
+            <a:endParaRPr lang="es-CL" sz="1800" i="1" dirty="0"/>
+          </a:p>
+        </p:txBody>
+      </p:sp>
+      <p:sp>
+        <p:nvSpPr>
+          <p:cNvPr id="7" name="Título 1">
+            <a:extLst>
+              <a:ext uri="{FF2B5EF4-FFF2-40B4-BE49-F238E27FC236}">
+                <a16:creationId xmlns:a16="http://schemas.microsoft.com/office/drawing/2014/main" id="{F0AD5F41-9325-E9D6-C693-8308BF6BDAC1}"/>
+              </a:ext>
+            </a:extLst>
+          </p:cNvPr>
+          <p:cNvSpPr txBox="1">
+            <a:spLocks/>
+          </p:cNvSpPr>
+          <p:nvPr/>
+        </p:nvSpPr>
+        <p:spPr>
+          <a:xfrm>
+            <a:off x="-404974" y="-219601"/>
+            <a:ext cx="10515600" cy="1325563"/>
+          </a:xfrm>
+          <a:prstGeom prst="rect">
+            <a:avLst/>
+          </a:prstGeom>
+        </p:spPr>
+        <p:txBody>
+          <a:bodyPr vert="horz" lIns="91440" tIns="45720" rIns="91440" bIns="45720" rtlCol="0" anchor="b">
+            <a:noAutofit/>
+          </a:bodyPr>
+          <a:lstStyle>
+            <a:lvl1pPr algn="ctr" defTabSz="914400" rtl="0" eaLnBrk="1" latinLnBrk="0" hangingPunct="1">
+              <a:lnSpc>
+                <a:spcPct val="90000"/>
+              </a:lnSpc>
+              <a:spcBef>
+                <a:spcPct val="0"/>
+              </a:spcBef>
+              <a:buNone/>
+              <a:defRPr sz="6000" kern="1200">
+                <a:solidFill>
+                  <a:schemeClr val="tx1"/>
+                </a:solidFill>
+                <a:latin typeface="+mj-lt"/>
+                <a:ea typeface="+mj-ea"/>
+                <a:cs typeface="+mj-cs"/>
+              </a:defRPr>
+            </a:lvl1pPr>
+          </a:lstStyle>
+          <a:p>
+            <a:r>
+              <a:rPr lang="es-MX" sz="3600" b="1" i="1" dirty="0"/>
+              <a:t>Noticias: </a:t>
+            </a:r>
+            <a:r>
+              <a:rPr lang="es-MX" sz="3600" dirty="0"/>
+              <a:t>AI no es solo software, sino hardware.</a:t>
+            </a:r>
+            <a:r>
+              <a:rPr lang="es-MX" sz="3600" b="1" i="1" dirty="0"/>
+              <a:t> </a:t>
+            </a:r>
+            <a:endParaRPr lang="es-CL" sz="3600" i="1" dirty="0"/>
+          </a:p>
+        </p:txBody>
+      </p:sp>
+      <p:pic>
+        <p:nvPicPr>
+          <p:cNvPr id="9" name="Imagen 8">
+            <a:extLst>
+              <a:ext uri="{FF2B5EF4-FFF2-40B4-BE49-F238E27FC236}">
+                <a16:creationId xmlns:a16="http://schemas.microsoft.com/office/drawing/2014/main" id="{2616FA3C-C9A7-6507-8B84-70FEBC0C1B6B}"/>
+              </a:ext>
+            </a:extLst>
+          </p:cNvPr>
+          <p:cNvPicPr>
+            <a:picLocks noChangeAspect="1"/>
+          </p:cNvPicPr>
+          <p:nvPr/>
+        </p:nvPicPr>
+        <p:blipFill>
+          <a:blip r:embed="rId3"/>
+          <a:stretch>
+            <a:fillRect/>
+          </a:stretch>
+        </p:blipFill>
+        <p:spPr>
+          <a:xfrm>
+            <a:off x="582101" y="1239526"/>
+            <a:ext cx="11027797" cy="5004161"/>
+          </a:xfrm>
+          <a:prstGeom prst="rect">
+            <a:avLst/>
+          </a:prstGeom>
+        </p:spPr>
+      </p:pic>
+    </p:spTree>
+    <p:extLst>
+      <p:ext uri="{BB962C8B-B14F-4D97-AF65-F5344CB8AC3E}">
+        <p14:creationId xmlns:p14="http://schemas.microsoft.com/office/powerpoint/2010/main" val="1906985662"/>
+      </p:ext>
+    </p:extLst>
+  </p:cSld>
+  <p:clrMapOvr>
+    <a:masterClrMapping/>
+  </p:clrMapOvr>
+</p:sld>
+</file>
+
+<file path=ppt/slides/slide20.xml><?xml version="1.0" encoding="utf-8"?>
 <p:sld xmlns:a="http://schemas.openxmlformats.org/drawingml/2006/main" xmlns:r="http://schemas.openxmlformats.org/officeDocument/2006/relationships" xmlns:p="http://schemas.openxmlformats.org/presentationml/2006/main">
   <p:cSld>
     <p:spTree>
@@ -10907,505 +11589,7 @@
 </p:sld>
 </file>
 
-<file path=ppt/slides/slide2.xml><?xml version="1.0" encoding="utf-8"?>
-<p:sld xmlns:a="http://schemas.openxmlformats.org/drawingml/2006/main" xmlns:r="http://schemas.openxmlformats.org/officeDocument/2006/relationships" xmlns:p="http://schemas.openxmlformats.org/presentationml/2006/main">
-  <p:cSld>
-    <p:spTree>
-      <p:nvGrpSpPr>
-        <p:cNvPr id="1" name="">
-          <a:extLst>
-            <a:ext uri="{FF2B5EF4-FFF2-40B4-BE49-F238E27FC236}">
-              <a16:creationId xmlns:a16="http://schemas.microsoft.com/office/drawing/2014/main" id="{718156E4-CA9F-D506-B0D1-EEE348E0C958}"/>
-            </a:ext>
-          </a:extLst>
-        </p:cNvPr>
-        <p:cNvGrpSpPr/>
-        <p:nvPr/>
-      </p:nvGrpSpPr>
-      <p:grpSpPr>
-        <a:xfrm>
-          <a:off x="0" y="0"/>
-          <a:ext cx="0" cy="0"/>
-          <a:chOff x="0" y="0"/>
-          <a:chExt cx="0" cy="0"/>
-        </a:xfrm>
-      </p:grpSpPr>
-      <p:sp>
-        <p:nvSpPr>
-          <p:cNvPr id="2" name="Título 1">
-            <a:extLst>
-              <a:ext uri="{FF2B5EF4-FFF2-40B4-BE49-F238E27FC236}">
-                <a16:creationId xmlns:a16="http://schemas.microsoft.com/office/drawing/2014/main" id="{C52EDB48-DD50-4819-B34A-4BE67304E529}"/>
-              </a:ext>
-            </a:extLst>
-          </p:cNvPr>
-          <p:cNvSpPr>
-            <a:spLocks noGrp="1"/>
-          </p:cNvSpPr>
-          <p:nvPr>
-            <p:ph type="title"/>
-          </p:nvPr>
-        </p:nvSpPr>
-        <p:spPr>
-          <a:xfrm>
-            <a:off x="620313" y="193100"/>
-            <a:ext cx="10515600" cy="1325563"/>
-          </a:xfrm>
-        </p:spPr>
-        <p:txBody>
-          <a:bodyPr>
-            <a:noAutofit/>
-          </a:bodyPr>
-          <a:lstStyle/>
-          <a:p>
-            <a:r>
-              <a:rPr lang="es-MX" sz="3600" b="1" i="1" dirty="0"/>
-              <a:t>Recapitulemos: </a:t>
-            </a:r>
-            <a:r>
-              <a:rPr lang="es-MX" sz="3600" i="1" dirty="0"/>
-              <a:t>Los </a:t>
-            </a:r>
-            <a:r>
-              <a:rPr lang="es-MX" sz="3600" i="1" dirty="0" err="1"/>
-              <a:t>LLMs</a:t>
-            </a:r>
-            <a:r>
-              <a:rPr lang="es-MX" sz="3600" i="1" dirty="0"/>
-              <a:t> como un sistema aislado.</a:t>
-            </a:r>
-            <a:r>
-              <a:rPr lang="es-MX" sz="3600" b="1" i="1" dirty="0"/>
-              <a:t> </a:t>
-            </a:r>
-            <a:endParaRPr lang="es-CL" sz="3600" i="1" dirty="0"/>
-          </a:p>
-        </p:txBody>
-      </p:sp>
-      <p:pic>
-        <p:nvPicPr>
-          <p:cNvPr id="4" name="Picture 2" descr="Duoc UC - Learn Chile">
-            <a:extLst>
-              <a:ext uri="{FF2B5EF4-FFF2-40B4-BE49-F238E27FC236}">
-                <a16:creationId xmlns:a16="http://schemas.microsoft.com/office/drawing/2014/main" id="{1201A8FD-C688-8C94-3C88-C8750E71A9A6}"/>
-              </a:ext>
-            </a:extLst>
-          </p:cNvPr>
-          <p:cNvPicPr>
-            <a:picLocks noChangeAspect="1" noChangeArrowheads="1"/>
-          </p:cNvPicPr>
-          <p:nvPr/>
-        </p:nvPicPr>
-        <p:blipFill>
-          <a:blip r:embed="rId2">
-            <a:extLst>
-              <a:ext uri="{28A0092B-C50C-407E-A947-70E740481C1C}">
-                <a14:useLocalDpi xmlns:a14="http://schemas.microsoft.com/office/drawing/2010/main" val="0"/>
-              </a:ext>
-            </a:extLst>
-          </a:blip>
-          <a:srcRect/>
-          <a:stretch>
-            <a:fillRect/>
-          </a:stretch>
-        </p:blipFill>
-        <p:spPr bwMode="auto">
-          <a:xfrm>
-            <a:off x="11135913" y="30480"/>
-            <a:ext cx="974807" cy="825402"/>
-          </a:xfrm>
-          <a:prstGeom prst="rect">
-            <a:avLst/>
-          </a:prstGeom>
-          <a:noFill/>
-          <a:extLst>
-            <a:ext uri="{909E8E84-426E-40DD-AFC4-6F175D3DCCD1}">
-              <a14:hiddenFill xmlns:a14="http://schemas.microsoft.com/office/drawing/2010/main">
-                <a:solidFill>
-                  <a:srgbClr val="FFFFFF"/>
-                </a:solidFill>
-              </a14:hiddenFill>
-            </a:ext>
-          </a:extLst>
-        </p:spPr>
-      </p:pic>
-      <p:sp>
-        <p:nvSpPr>
-          <p:cNvPr id="3" name="Rectángulo: esquinas redondeadas 2">
-            <a:extLst>
-              <a:ext uri="{FF2B5EF4-FFF2-40B4-BE49-F238E27FC236}">
-                <a16:creationId xmlns:a16="http://schemas.microsoft.com/office/drawing/2014/main" id="{0AD34305-CE44-2BAB-65E8-F5B7F8D76A88}"/>
-              </a:ext>
-            </a:extLst>
-          </p:cNvPr>
-          <p:cNvSpPr/>
-          <p:nvPr/>
-        </p:nvSpPr>
-        <p:spPr>
-          <a:xfrm>
-            <a:off x="4804464" y="2869058"/>
-            <a:ext cx="2147298" cy="1407559"/>
-          </a:xfrm>
-          <a:prstGeom prst="roundRect">
-            <a:avLst/>
-          </a:prstGeom>
-          <a:solidFill>
-            <a:schemeClr val="bg1"/>
-          </a:solidFill>
-          <a:ln>
-            <a:solidFill>
-              <a:schemeClr val="tx1"/>
-            </a:solidFill>
-          </a:ln>
-        </p:spPr>
-        <p:style>
-          <a:lnRef idx="2">
-            <a:schemeClr val="accent1">
-              <a:shade val="15000"/>
-            </a:schemeClr>
-          </a:lnRef>
-          <a:fillRef idx="1">
-            <a:schemeClr val="accent1"/>
-          </a:fillRef>
-          <a:effectRef idx="0">
-            <a:schemeClr val="accent1"/>
-          </a:effectRef>
-          <a:fontRef idx="minor">
-            <a:schemeClr val="lt1"/>
-          </a:fontRef>
-        </p:style>
-        <p:txBody>
-          <a:bodyPr rtlCol="0" anchor="ctr"/>
-          <a:lstStyle/>
-          <a:p>
-            <a:pPr algn="ctr"/>
-            <a:r>
-              <a:rPr lang="es-MX" b="1" i="1" dirty="0" err="1">
-                <a:solidFill>
-                  <a:schemeClr val="tx1"/>
-                </a:solidFill>
-              </a:rPr>
-              <a:t>LLMs</a:t>
-            </a:r>
-            <a:endParaRPr lang="es-CL" b="1" i="1" dirty="0">
-              <a:solidFill>
-                <a:schemeClr val="tx1"/>
-              </a:solidFill>
-            </a:endParaRPr>
-          </a:p>
-        </p:txBody>
-      </p:sp>
-      <p:cxnSp>
-        <p:nvCxnSpPr>
-          <p:cNvPr id="8" name="Conector recto de flecha 7">
-            <a:extLst>
-              <a:ext uri="{FF2B5EF4-FFF2-40B4-BE49-F238E27FC236}">
-                <a16:creationId xmlns:a16="http://schemas.microsoft.com/office/drawing/2014/main" id="{786F2804-74D3-F5D1-4CD1-9D7071DF7209}"/>
-              </a:ext>
-            </a:extLst>
-          </p:cNvPr>
-          <p:cNvCxnSpPr>
-            <a:cxnSpLocks/>
-            <a:stCxn id="3" idx="3"/>
-          </p:cNvCxnSpPr>
-          <p:nvPr/>
-        </p:nvCxnSpPr>
-        <p:spPr>
-          <a:xfrm flipV="1">
-            <a:off x="6951762" y="3572837"/>
-            <a:ext cx="2366899" cy="1"/>
-          </a:xfrm>
-          <a:prstGeom prst="straightConnector1">
-            <a:avLst/>
-          </a:prstGeom>
-          <a:ln>
-            <a:solidFill>
-              <a:schemeClr val="tx1"/>
-            </a:solidFill>
-            <a:tailEnd type="triangle"/>
-          </a:ln>
-        </p:spPr>
-        <p:style>
-          <a:lnRef idx="1">
-            <a:schemeClr val="accent1"/>
-          </a:lnRef>
-          <a:fillRef idx="0">
-            <a:schemeClr val="accent1"/>
-          </a:fillRef>
-          <a:effectRef idx="0">
-            <a:schemeClr val="accent1"/>
-          </a:effectRef>
-          <a:fontRef idx="minor">
-            <a:schemeClr val="tx1"/>
-          </a:fontRef>
-        </p:style>
-      </p:cxnSp>
-      <p:cxnSp>
-        <p:nvCxnSpPr>
-          <p:cNvPr id="11" name="Conector recto de flecha 10">
-            <a:extLst>
-              <a:ext uri="{FF2B5EF4-FFF2-40B4-BE49-F238E27FC236}">
-                <a16:creationId xmlns:a16="http://schemas.microsoft.com/office/drawing/2014/main" id="{A59258CD-5417-BAD4-A3ED-46E437E2E724}"/>
-              </a:ext>
-            </a:extLst>
-          </p:cNvPr>
-          <p:cNvCxnSpPr/>
-          <p:nvPr/>
-        </p:nvCxnSpPr>
-        <p:spPr>
-          <a:xfrm>
-            <a:off x="2307844" y="3572837"/>
-            <a:ext cx="2496620" cy="0"/>
-          </a:xfrm>
-          <a:prstGeom prst="straightConnector1">
-            <a:avLst/>
-          </a:prstGeom>
-          <a:ln>
-            <a:solidFill>
-              <a:schemeClr val="tx1"/>
-            </a:solidFill>
-            <a:tailEnd type="triangle"/>
-          </a:ln>
-        </p:spPr>
-        <p:style>
-          <a:lnRef idx="1">
-            <a:schemeClr val="accent1"/>
-          </a:lnRef>
-          <a:fillRef idx="0">
-            <a:schemeClr val="accent1"/>
-          </a:fillRef>
-          <a:effectRef idx="0">
-            <a:schemeClr val="accent1"/>
-          </a:effectRef>
-          <a:fontRef idx="minor">
-            <a:schemeClr val="tx1"/>
-          </a:fontRef>
-        </p:style>
-      </p:cxnSp>
-      <p:sp>
-        <p:nvSpPr>
-          <p:cNvPr id="12" name="CuadroTexto 11">
-            <a:extLst>
-              <a:ext uri="{FF2B5EF4-FFF2-40B4-BE49-F238E27FC236}">
-                <a16:creationId xmlns:a16="http://schemas.microsoft.com/office/drawing/2014/main" id="{589E844E-224D-B9B5-BC12-F5AE94109EB7}"/>
-              </a:ext>
-            </a:extLst>
-          </p:cNvPr>
-          <p:cNvSpPr txBox="1"/>
-          <p:nvPr/>
-        </p:nvSpPr>
-        <p:spPr>
-          <a:xfrm>
-            <a:off x="1629749" y="3100497"/>
-            <a:ext cx="3174715" cy="369332"/>
-          </a:xfrm>
-          <a:prstGeom prst="rect">
-            <a:avLst/>
-          </a:prstGeom>
-          <a:noFill/>
-        </p:spPr>
-        <p:txBody>
-          <a:bodyPr wrap="square" rtlCol="0">
-            <a:spAutoFit/>
-          </a:bodyPr>
-          <a:lstStyle/>
-          <a:p>
-            <a:r>
-              <a:rPr lang="es-MX" i="1" dirty="0" err="1"/>
-              <a:t>Prompts</a:t>
-            </a:r>
-            <a:r>
-              <a:rPr lang="es-MX" i="1" dirty="0"/>
-              <a:t> &amp; </a:t>
-            </a:r>
-            <a:r>
-              <a:rPr lang="es-MX" i="1" dirty="0" err="1"/>
-              <a:t>Parametros</a:t>
-            </a:r>
-            <a:r>
-              <a:rPr lang="es-MX" i="1" dirty="0"/>
-              <a:t>.</a:t>
-            </a:r>
-            <a:endParaRPr lang="es-CL" i="1" dirty="0"/>
-          </a:p>
-        </p:txBody>
-      </p:sp>
-      <p:sp>
-        <p:nvSpPr>
-          <p:cNvPr id="13" name="CuadroTexto 12">
-            <a:extLst>
-              <a:ext uri="{FF2B5EF4-FFF2-40B4-BE49-F238E27FC236}">
-                <a16:creationId xmlns:a16="http://schemas.microsoft.com/office/drawing/2014/main" id="{A5C21B5B-A3A9-EC82-6BD9-6CB818DEFA83}"/>
-              </a:ext>
-            </a:extLst>
-          </p:cNvPr>
-          <p:cNvSpPr txBox="1"/>
-          <p:nvPr/>
-        </p:nvSpPr>
-        <p:spPr>
-          <a:xfrm>
-            <a:off x="7731303" y="3036282"/>
-            <a:ext cx="3174715" cy="369332"/>
-          </a:xfrm>
-          <a:prstGeom prst="rect">
-            <a:avLst/>
-          </a:prstGeom>
-          <a:noFill/>
-        </p:spPr>
-        <p:txBody>
-          <a:bodyPr wrap="square" rtlCol="0">
-            <a:spAutoFit/>
-          </a:bodyPr>
-          <a:lstStyle/>
-          <a:p>
-            <a:r>
-              <a:rPr lang="es-MX" i="1" dirty="0"/>
-              <a:t>Texto Generado, tokens.</a:t>
-            </a:r>
-            <a:endParaRPr lang="es-CL" i="1" dirty="0"/>
-          </a:p>
-        </p:txBody>
-      </p:sp>
-      <p:sp>
-        <p:nvSpPr>
-          <p:cNvPr id="14" name="CuadroTexto 13">
-            <a:extLst>
-              <a:ext uri="{FF2B5EF4-FFF2-40B4-BE49-F238E27FC236}">
-                <a16:creationId xmlns:a16="http://schemas.microsoft.com/office/drawing/2014/main" id="{1345D11E-0AF7-38E1-C73B-DEF4D9F6E772}"/>
-              </a:ext>
-            </a:extLst>
-          </p:cNvPr>
-          <p:cNvSpPr txBox="1"/>
-          <p:nvPr/>
-        </p:nvSpPr>
-        <p:spPr>
-          <a:xfrm>
-            <a:off x="5364404" y="4443840"/>
-            <a:ext cx="3174715" cy="646331"/>
-          </a:xfrm>
-          <a:prstGeom prst="rect">
-            <a:avLst/>
-          </a:prstGeom>
-          <a:noFill/>
-        </p:spPr>
-        <p:txBody>
-          <a:bodyPr wrap="square" rtlCol="0">
-            <a:spAutoFit/>
-          </a:bodyPr>
-          <a:lstStyle/>
-          <a:p>
-            <a:r>
-              <a:rPr lang="es-MX" i="1" dirty="0"/>
-              <a:t>Modelos</a:t>
-            </a:r>
-          </a:p>
-          <a:p>
-            <a:endParaRPr lang="es-CL" i="1" dirty="0"/>
-          </a:p>
-        </p:txBody>
-      </p:sp>
-      <p:cxnSp>
-        <p:nvCxnSpPr>
-          <p:cNvPr id="16" name="Conector recto de flecha 15">
-            <a:extLst>
-              <a:ext uri="{FF2B5EF4-FFF2-40B4-BE49-F238E27FC236}">
-                <a16:creationId xmlns:a16="http://schemas.microsoft.com/office/drawing/2014/main" id="{4850914A-B7B0-C2C4-8E5F-E90582D02BBA}"/>
-              </a:ext>
-            </a:extLst>
-          </p:cNvPr>
-          <p:cNvCxnSpPr>
-            <a:cxnSpLocks/>
-          </p:cNvCxnSpPr>
-          <p:nvPr/>
-        </p:nvCxnSpPr>
-        <p:spPr>
-          <a:xfrm>
-            <a:off x="2157573" y="2291137"/>
-            <a:ext cx="0" cy="745145"/>
-          </a:xfrm>
-          <a:prstGeom prst="straightConnector1">
-            <a:avLst/>
-          </a:prstGeom>
-          <a:ln>
-            <a:solidFill>
-              <a:schemeClr val="tx1"/>
-            </a:solidFill>
-            <a:tailEnd type="triangle"/>
-          </a:ln>
-        </p:spPr>
-        <p:style>
-          <a:lnRef idx="1">
-            <a:schemeClr val="accent1"/>
-          </a:lnRef>
-          <a:fillRef idx="0">
-            <a:schemeClr val="accent1"/>
-          </a:fillRef>
-          <a:effectRef idx="0">
-            <a:schemeClr val="accent1"/>
-          </a:effectRef>
-          <a:fontRef idx="minor">
-            <a:schemeClr val="tx1"/>
-          </a:fontRef>
-        </p:style>
-      </p:cxnSp>
-      <p:sp>
-        <p:nvSpPr>
-          <p:cNvPr id="17" name="CuadroTexto 16">
-            <a:extLst>
-              <a:ext uri="{FF2B5EF4-FFF2-40B4-BE49-F238E27FC236}">
-                <a16:creationId xmlns:a16="http://schemas.microsoft.com/office/drawing/2014/main" id="{2015EC12-F033-8286-9855-670714312BC7}"/>
-              </a:ext>
-            </a:extLst>
-          </p:cNvPr>
-          <p:cNvSpPr txBox="1"/>
-          <p:nvPr/>
-        </p:nvSpPr>
-        <p:spPr>
-          <a:xfrm>
-            <a:off x="1157138" y="1870301"/>
-            <a:ext cx="3174715" cy="369332"/>
-          </a:xfrm>
-          <a:prstGeom prst="rect">
-            <a:avLst/>
-          </a:prstGeom>
-          <a:noFill/>
-        </p:spPr>
-        <p:txBody>
-          <a:bodyPr wrap="square" rtlCol="0">
-            <a:spAutoFit/>
-          </a:bodyPr>
-          <a:lstStyle/>
-          <a:p>
-            <a:r>
-              <a:rPr lang="es-CL" b="1" dirty="0" err="1"/>
-              <a:t>Prompt</a:t>
-            </a:r>
-            <a:r>
-              <a:rPr lang="es-CL" b="1" dirty="0"/>
-              <a:t> </a:t>
-            </a:r>
-            <a:r>
-              <a:rPr lang="es-CL" b="1" dirty="0" err="1"/>
-              <a:t>Engineering</a:t>
-            </a:r>
-            <a:endParaRPr lang="es-CL" i="1" dirty="0"/>
-          </a:p>
-        </p:txBody>
-      </p:sp>
-    </p:spTree>
-    <p:extLst>
-      <p:ext uri="{BB962C8B-B14F-4D97-AF65-F5344CB8AC3E}">
-        <p14:creationId xmlns:p14="http://schemas.microsoft.com/office/powerpoint/2010/main" val="888093110"/>
-      </p:ext>
-    </p:extLst>
-  </p:cSld>
-  <p:clrMapOvr>
-    <a:masterClrMapping/>
-  </p:clrMapOvr>
-</p:sld>
-</file>
-
-<file path=ppt/slides/slide20.xml><?xml version="1.0" encoding="utf-8"?>
+<file path=ppt/slides/slide21.xml><?xml version="1.0" encoding="utf-8"?>
 <p:sld xmlns:a="http://schemas.openxmlformats.org/drawingml/2006/main" xmlns:r="http://schemas.openxmlformats.org/officeDocument/2006/relationships" xmlns:p="http://schemas.openxmlformats.org/presentationml/2006/main">
   <p:cSld>
     <p:spTree>
@@ -12386,7 +12570,7 @@
 </p:sld>
 </file>
 
-<file path=ppt/slides/slide21.xml><?xml version="1.0" encoding="utf-8"?>
+<file path=ppt/slides/slide22.xml><?xml version="1.0" encoding="utf-8"?>
 <p:sld xmlns:a="http://schemas.openxmlformats.org/drawingml/2006/main" xmlns:r="http://schemas.openxmlformats.org/officeDocument/2006/relationships" xmlns:p="http://schemas.openxmlformats.org/presentationml/2006/main">
   <p:cSld>
     <p:spTree>
@@ -12578,7 +12762,7 @@
 </p:sld>
 </file>
 
-<file path=ppt/slides/slide22.xml><?xml version="1.0" encoding="utf-8"?>
+<file path=ppt/slides/slide23.xml><?xml version="1.0" encoding="utf-8"?>
 <p:sld xmlns:a="http://schemas.openxmlformats.org/drawingml/2006/main" xmlns:r="http://schemas.openxmlformats.org/officeDocument/2006/relationships" xmlns:p="http://schemas.openxmlformats.org/presentationml/2006/main">
   <p:cSld>
     <p:spTree>
@@ -12720,7 +12904,7 @@
 </p:sld>
 </file>
 
-<file path=ppt/slides/slide23.xml><?xml version="1.0" encoding="utf-8"?>
+<file path=ppt/slides/slide24.xml><?xml version="1.0" encoding="utf-8"?>
 <p:sld xmlns:a="http://schemas.openxmlformats.org/drawingml/2006/main" xmlns:r="http://schemas.openxmlformats.org/officeDocument/2006/relationships" xmlns:p="http://schemas.openxmlformats.org/presentationml/2006/main">
   <p:cSld>
     <p:spTree>
@@ -12908,6 +13092,504 @@
         <p:cNvPr id="1" name="">
           <a:extLst>
             <a:ext uri="{FF2B5EF4-FFF2-40B4-BE49-F238E27FC236}">
+              <a16:creationId xmlns:a16="http://schemas.microsoft.com/office/drawing/2014/main" id="{718156E4-CA9F-D506-B0D1-EEE348E0C958}"/>
+            </a:ext>
+          </a:extLst>
+        </p:cNvPr>
+        <p:cNvGrpSpPr/>
+        <p:nvPr/>
+      </p:nvGrpSpPr>
+      <p:grpSpPr>
+        <a:xfrm>
+          <a:off x="0" y="0"/>
+          <a:ext cx="0" cy="0"/>
+          <a:chOff x="0" y="0"/>
+          <a:chExt cx="0" cy="0"/>
+        </a:xfrm>
+      </p:grpSpPr>
+      <p:sp>
+        <p:nvSpPr>
+          <p:cNvPr id="2" name="Título 1">
+            <a:extLst>
+              <a:ext uri="{FF2B5EF4-FFF2-40B4-BE49-F238E27FC236}">
+                <a16:creationId xmlns:a16="http://schemas.microsoft.com/office/drawing/2014/main" id="{C52EDB48-DD50-4819-B34A-4BE67304E529}"/>
+              </a:ext>
+            </a:extLst>
+          </p:cNvPr>
+          <p:cNvSpPr>
+            <a:spLocks noGrp="1"/>
+          </p:cNvSpPr>
+          <p:nvPr>
+            <p:ph type="title"/>
+          </p:nvPr>
+        </p:nvSpPr>
+        <p:spPr>
+          <a:xfrm>
+            <a:off x="620313" y="193100"/>
+            <a:ext cx="10515600" cy="1325563"/>
+          </a:xfrm>
+        </p:spPr>
+        <p:txBody>
+          <a:bodyPr>
+            <a:noAutofit/>
+          </a:bodyPr>
+          <a:lstStyle/>
+          <a:p>
+            <a:r>
+              <a:rPr lang="es-MX" sz="3600" b="1" i="1" dirty="0"/>
+              <a:t>Recapitulemos: </a:t>
+            </a:r>
+            <a:r>
+              <a:rPr lang="es-MX" sz="3600" i="1" dirty="0"/>
+              <a:t>Los </a:t>
+            </a:r>
+            <a:r>
+              <a:rPr lang="es-MX" sz="3600" i="1" dirty="0" err="1"/>
+              <a:t>LLMs</a:t>
+            </a:r>
+            <a:r>
+              <a:rPr lang="es-MX" sz="3600" i="1" dirty="0"/>
+              <a:t> como un sistema aislado.</a:t>
+            </a:r>
+            <a:r>
+              <a:rPr lang="es-MX" sz="3600" b="1" i="1" dirty="0"/>
+              <a:t> </a:t>
+            </a:r>
+            <a:endParaRPr lang="es-CL" sz="3600" i="1" dirty="0"/>
+          </a:p>
+        </p:txBody>
+      </p:sp>
+      <p:pic>
+        <p:nvPicPr>
+          <p:cNvPr id="4" name="Picture 2" descr="Duoc UC - Learn Chile">
+            <a:extLst>
+              <a:ext uri="{FF2B5EF4-FFF2-40B4-BE49-F238E27FC236}">
+                <a16:creationId xmlns:a16="http://schemas.microsoft.com/office/drawing/2014/main" id="{1201A8FD-C688-8C94-3C88-C8750E71A9A6}"/>
+              </a:ext>
+            </a:extLst>
+          </p:cNvPr>
+          <p:cNvPicPr>
+            <a:picLocks noChangeAspect="1" noChangeArrowheads="1"/>
+          </p:cNvPicPr>
+          <p:nvPr/>
+        </p:nvPicPr>
+        <p:blipFill>
+          <a:blip r:embed="rId2">
+            <a:extLst>
+              <a:ext uri="{28A0092B-C50C-407E-A947-70E740481C1C}">
+                <a14:useLocalDpi xmlns:a14="http://schemas.microsoft.com/office/drawing/2010/main" val="0"/>
+              </a:ext>
+            </a:extLst>
+          </a:blip>
+          <a:srcRect/>
+          <a:stretch>
+            <a:fillRect/>
+          </a:stretch>
+        </p:blipFill>
+        <p:spPr bwMode="auto">
+          <a:xfrm>
+            <a:off x="11135913" y="30480"/>
+            <a:ext cx="974807" cy="825402"/>
+          </a:xfrm>
+          <a:prstGeom prst="rect">
+            <a:avLst/>
+          </a:prstGeom>
+          <a:noFill/>
+          <a:extLst>
+            <a:ext uri="{909E8E84-426E-40DD-AFC4-6F175D3DCCD1}">
+              <a14:hiddenFill xmlns:a14="http://schemas.microsoft.com/office/drawing/2010/main">
+                <a:solidFill>
+                  <a:srgbClr val="FFFFFF"/>
+                </a:solidFill>
+              </a14:hiddenFill>
+            </a:ext>
+          </a:extLst>
+        </p:spPr>
+      </p:pic>
+      <p:sp>
+        <p:nvSpPr>
+          <p:cNvPr id="3" name="Rectángulo: esquinas redondeadas 2">
+            <a:extLst>
+              <a:ext uri="{FF2B5EF4-FFF2-40B4-BE49-F238E27FC236}">
+                <a16:creationId xmlns:a16="http://schemas.microsoft.com/office/drawing/2014/main" id="{0AD34305-CE44-2BAB-65E8-F5B7F8D76A88}"/>
+              </a:ext>
+            </a:extLst>
+          </p:cNvPr>
+          <p:cNvSpPr/>
+          <p:nvPr/>
+        </p:nvSpPr>
+        <p:spPr>
+          <a:xfrm>
+            <a:off x="4804464" y="2869058"/>
+            <a:ext cx="2147298" cy="1407559"/>
+          </a:xfrm>
+          <a:prstGeom prst="roundRect">
+            <a:avLst/>
+          </a:prstGeom>
+          <a:solidFill>
+            <a:schemeClr val="bg1"/>
+          </a:solidFill>
+          <a:ln>
+            <a:solidFill>
+              <a:schemeClr val="tx1"/>
+            </a:solidFill>
+          </a:ln>
+        </p:spPr>
+        <p:style>
+          <a:lnRef idx="2">
+            <a:schemeClr val="accent1">
+              <a:shade val="15000"/>
+            </a:schemeClr>
+          </a:lnRef>
+          <a:fillRef idx="1">
+            <a:schemeClr val="accent1"/>
+          </a:fillRef>
+          <a:effectRef idx="0">
+            <a:schemeClr val="accent1"/>
+          </a:effectRef>
+          <a:fontRef idx="minor">
+            <a:schemeClr val="lt1"/>
+          </a:fontRef>
+        </p:style>
+        <p:txBody>
+          <a:bodyPr rtlCol="0" anchor="ctr"/>
+          <a:lstStyle/>
+          <a:p>
+            <a:pPr algn="ctr"/>
+            <a:r>
+              <a:rPr lang="es-MX" b="1" i="1" dirty="0" err="1">
+                <a:solidFill>
+                  <a:schemeClr val="tx1"/>
+                </a:solidFill>
+              </a:rPr>
+              <a:t>LLMs</a:t>
+            </a:r>
+            <a:endParaRPr lang="es-CL" b="1" i="1" dirty="0">
+              <a:solidFill>
+                <a:schemeClr val="tx1"/>
+              </a:solidFill>
+            </a:endParaRPr>
+          </a:p>
+        </p:txBody>
+      </p:sp>
+      <p:cxnSp>
+        <p:nvCxnSpPr>
+          <p:cNvPr id="8" name="Conector recto de flecha 7">
+            <a:extLst>
+              <a:ext uri="{FF2B5EF4-FFF2-40B4-BE49-F238E27FC236}">
+                <a16:creationId xmlns:a16="http://schemas.microsoft.com/office/drawing/2014/main" id="{786F2804-74D3-F5D1-4CD1-9D7071DF7209}"/>
+              </a:ext>
+            </a:extLst>
+          </p:cNvPr>
+          <p:cNvCxnSpPr>
+            <a:cxnSpLocks/>
+            <a:stCxn id="3" idx="3"/>
+          </p:cNvCxnSpPr>
+          <p:nvPr/>
+        </p:nvCxnSpPr>
+        <p:spPr>
+          <a:xfrm flipV="1">
+            <a:off x="6951762" y="3572837"/>
+            <a:ext cx="2366899" cy="1"/>
+          </a:xfrm>
+          <a:prstGeom prst="straightConnector1">
+            <a:avLst/>
+          </a:prstGeom>
+          <a:ln>
+            <a:solidFill>
+              <a:schemeClr val="tx1"/>
+            </a:solidFill>
+            <a:tailEnd type="triangle"/>
+          </a:ln>
+        </p:spPr>
+        <p:style>
+          <a:lnRef idx="1">
+            <a:schemeClr val="accent1"/>
+          </a:lnRef>
+          <a:fillRef idx="0">
+            <a:schemeClr val="accent1"/>
+          </a:fillRef>
+          <a:effectRef idx="0">
+            <a:schemeClr val="accent1"/>
+          </a:effectRef>
+          <a:fontRef idx="minor">
+            <a:schemeClr val="tx1"/>
+          </a:fontRef>
+        </p:style>
+      </p:cxnSp>
+      <p:cxnSp>
+        <p:nvCxnSpPr>
+          <p:cNvPr id="11" name="Conector recto de flecha 10">
+            <a:extLst>
+              <a:ext uri="{FF2B5EF4-FFF2-40B4-BE49-F238E27FC236}">
+                <a16:creationId xmlns:a16="http://schemas.microsoft.com/office/drawing/2014/main" id="{A59258CD-5417-BAD4-A3ED-46E437E2E724}"/>
+              </a:ext>
+            </a:extLst>
+          </p:cNvPr>
+          <p:cNvCxnSpPr/>
+          <p:nvPr/>
+        </p:nvCxnSpPr>
+        <p:spPr>
+          <a:xfrm>
+            <a:off x="2307844" y="3572837"/>
+            <a:ext cx="2496620" cy="0"/>
+          </a:xfrm>
+          <a:prstGeom prst="straightConnector1">
+            <a:avLst/>
+          </a:prstGeom>
+          <a:ln>
+            <a:solidFill>
+              <a:schemeClr val="tx1"/>
+            </a:solidFill>
+            <a:tailEnd type="triangle"/>
+          </a:ln>
+        </p:spPr>
+        <p:style>
+          <a:lnRef idx="1">
+            <a:schemeClr val="accent1"/>
+          </a:lnRef>
+          <a:fillRef idx="0">
+            <a:schemeClr val="accent1"/>
+          </a:fillRef>
+          <a:effectRef idx="0">
+            <a:schemeClr val="accent1"/>
+          </a:effectRef>
+          <a:fontRef idx="minor">
+            <a:schemeClr val="tx1"/>
+          </a:fontRef>
+        </p:style>
+      </p:cxnSp>
+      <p:sp>
+        <p:nvSpPr>
+          <p:cNvPr id="12" name="CuadroTexto 11">
+            <a:extLst>
+              <a:ext uri="{FF2B5EF4-FFF2-40B4-BE49-F238E27FC236}">
+                <a16:creationId xmlns:a16="http://schemas.microsoft.com/office/drawing/2014/main" id="{589E844E-224D-B9B5-BC12-F5AE94109EB7}"/>
+              </a:ext>
+            </a:extLst>
+          </p:cNvPr>
+          <p:cNvSpPr txBox="1"/>
+          <p:nvPr/>
+        </p:nvSpPr>
+        <p:spPr>
+          <a:xfrm>
+            <a:off x="1629749" y="3100497"/>
+            <a:ext cx="3174715" cy="369332"/>
+          </a:xfrm>
+          <a:prstGeom prst="rect">
+            <a:avLst/>
+          </a:prstGeom>
+          <a:noFill/>
+        </p:spPr>
+        <p:txBody>
+          <a:bodyPr wrap="square" rtlCol="0">
+            <a:spAutoFit/>
+          </a:bodyPr>
+          <a:lstStyle/>
+          <a:p>
+            <a:r>
+              <a:rPr lang="es-MX" i="1" dirty="0" err="1"/>
+              <a:t>Prompts</a:t>
+            </a:r>
+            <a:r>
+              <a:rPr lang="es-MX" i="1" dirty="0"/>
+              <a:t> &amp; </a:t>
+            </a:r>
+            <a:r>
+              <a:rPr lang="es-MX" i="1" dirty="0" err="1"/>
+              <a:t>Parametros</a:t>
+            </a:r>
+            <a:r>
+              <a:rPr lang="es-MX" i="1" dirty="0"/>
+              <a:t>.</a:t>
+            </a:r>
+            <a:endParaRPr lang="es-CL" i="1" dirty="0"/>
+          </a:p>
+        </p:txBody>
+      </p:sp>
+      <p:sp>
+        <p:nvSpPr>
+          <p:cNvPr id="13" name="CuadroTexto 12">
+            <a:extLst>
+              <a:ext uri="{FF2B5EF4-FFF2-40B4-BE49-F238E27FC236}">
+                <a16:creationId xmlns:a16="http://schemas.microsoft.com/office/drawing/2014/main" id="{A5C21B5B-A3A9-EC82-6BD9-6CB818DEFA83}"/>
+              </a:ext>
+            </a:extLst>
+          </p:cNvPr>
+          <p:cNvSpPr txBox="1"/>
+          <p:nvPr/>
+        </p:nvSpPr>
+        <p:spPr>
+          <a:xfrm>
+            <a:off x="7731303" y="3036282"/>
+            <a:ext cx="3174715" cy="369332"/>
+          </a:xfrm>
+          <a:prstGeom prst="rect">
+            <a:avLst/>
+          </a:prstGeom>
+          <a:noFill/>
+        </p:spPr>
+        <p:txBody>
+          <a:bodyPr wrap="square" rtlCol="0">
+            <a:spAutoFit/>
+          </a:bodyPr>
+          <a:lstStyle/>
+          <a:p>
+            <a:r>
+              <a:rPr lang="es-MX" i="1" dirty="0"/>
+              <a:t>Texto Generado, tokens.</a:t>
+            </a:r>
+            <a:endParaRPr lang="es-CL" i="1" dirty="0"/>
+          </a:p>
+        </p:txBody>
+      </p:sp>
+      <p:sp>
+        <p:nvSpPr>
+          <p:cNvPr id="14" name="CuadroTexto 13">
+            <a:extLst>
+              <a:ext uri="{FF2B5EF4-FFF2-40B4-BE49-F238E27FC236}">
+                <a16:creationId xmlns:a16="http://schemas.microsoft.com/office/drawing/2014/main" id="{1345D11E-0AF7-38E1-C73B-DEF4D9F6E772}"/>
+              </a:ext>
+            </a:extLst>
+          </p:cNvPr>
+          <p:cNvSpPr txBox="1"/>
+          <p:nvPr/>
+        </p:nvSpPr>
+        <p:spPr>
+          <a:xfrm>
+            <a:off x="5364404" y="4443840"/>
+            <a:ext cx="3174715" cy="646331"/>
+          </a:xfrm>
+          <a:prstGeom prst="rect">
+            <a:avLst/>
+          </a:prstGeom>
+          <a:noFill/>
+        </p:spPr>
+        <p:txBody>
+          <a:bodyPr wrap="square" rtlCol="0">
+            <a:spAutoFit/>
+          </a:bodyPr>
+          <a:lstStyle/>
+          <a:p>
+            <a:r>
+              <a:rPr lang="es-MX" i="1" dirty="0"/>
+              <a:t>Modelos</a:t>
+            </a:r>
+          </a:p>
+          <a:p>
+            <a:endParaRPr lang="es-CL" i="1" dirty="0"/>
+          </a:p>
+        </p:txBody>
+      </p:sp>
+      <p:cxnSp>
+        <p:nvCxnSpPr>
+          <p:cNvPr id="16" name="Conector recto de flecha 15">
+            <a:extLst>
+              <a:ext uri="{FF2B5EF4-FFF2-40B4-BE49-F238E27FC236}">
+                <a16:creationId xmlns:a16="http://schemas.microsoft.com/office/drawing/2014/main" id="{4850914A-B7B0-C2C4-8E5F-E90582D02BBA}"/>
+              </a:ext>
+            </a:extLst>
+          </p:cNvPr>
+          <p:cNvCxnSpPr>
+            <a:cxnSpLocks/>
+          </p:cNvCxnSpPr>
+          <p:nvPr/>
+        </p:nvCxnSpPr>
+        <p:spPr>
+          <a:xfrm>
+            <a:off x="2157573" y="2291137"/>
+            <a:ext cx="0" cy="745145"/>
+          </a:xfrm>
+          <a:prstGeom prst="straightConnector1">
+            <a:avLst/>
+          </a:prstGeom>
+          <a:ln>
+            <a:solidFill>
+              <a:schemeClr val="tx1"/>
+            </a:solidFill>
+            <a:tailEnd type="triangle"/>
+          </a:ln>
+        </p:spPr>
+        <p:style>
+          <a:lnRef idx="1">
+            <a:schemeClr val="accent1"/>
+          </a:lnRef>
+          <a:fillRef idx="0">
+            <a:schemeClr val="accent1"/>
+          </a:fillRef>
+          <a:effectRef idx="0">
+            <a:schemeClr val="accent1"/>
+          </a:effectRef>
+          <a:fontRef idx="minor">
+            <a:schemeClr val="tx1"/>
+          </a:fontRef>
+        </p:style>
+      </p:cxnSp>
+      <p:sp>
+        <p:nvSpPr>
+          <p:cNvPr id="17" name="CuadroTexto 16">
+            <a:extLst>
+              <a:ext uri="{FF2B5EF4-FFF2-40B4-BE49-F238E27FC236}">
+                <a16:creationId xmlns:a16="http://schemas.microsoft.com/office/drawing/2014/main" id="{2015EC12-F033-8286-9855-670714312BC7}"/>
+              </a:ext>
+            </a:extLst>
+          </p:cNvPr>
+          <p:cNvSpPr txBox="1"/>
+          <p:nvPr/>
+        </p:nvSpPr>
+        <p:spPr>
+          <a:xfrm>
+            <a:off x="1157138" y="1870301"/>
+            <a:ext cx="3174715" cy="369332"/>
+          </a:xfrm>
+          <a:prstGeom prst="rect">
+            <a:avLst/>
+          </a:prstGeom>
+          <a:noFill/>
+        </p:spPr>
+        <p:txBody>
+          <a:bodyPr wrap="square" rtlCol="0">
+            <a:spAutoFit/>
+          </a:bodyPr>
+          <a:lstStyle/>
+          <a:p>
+            <a:r>
+              <a:rPr lang="es-CL" b="1" dirty="0" err="1"/>
+              <a:t>Prompt</a:t>
+            </a:r>
+            <a:r>
+              <a:rPr lang="es-CL" b="1" dirty="0"/>
+              <a:t> </a:t>
+            </a:r>
+            <a:r>
+              <a:rPr lang="es-CL" b="1" dirty="0" err="1"/>
+              <a:t>Engineering</a:t>
+            </a:r>
+            <a:endParaRPr lang="es-CL" i="1" dirty="0"/>
+          </a:p>
+        </p:txBody>
+      </p:sp>
+    </p:spTree>
+    <p:extLst>
+      <p:ext uri="{BB962C8B-B14F-4D97-AF65-F5344CB8AC3E}">
+        <p14:creationId xmlns:p14="http://schemas.microsoft.com/office/powerpoint/2010/main" val="888093110"/>
+      </p:ext>
+    </p:extLst>
+  </p:cSld>
+  <p:clrMapOvr>
+    <a:masterClrMapping/>
+  </p:clrMapOvr>
+</p:sld>
+</file>
+
+<file path=ppt/slides/slide4.xml><?xml version="1.0" encoding="utf-8"?>
+<p:sld xmlns:a="http://schemas.openxmlformats.org/drawingml/2006/main" xmlns:r="http://schemas.openxmlformats.org/officeDocument/2006/relationships" xmlns:p="http://schemas.openxmlformats.org/presentationml/2006/main">
+  <p:cSld>
+    <p:spTree>
+      <p:nvGrpSpPr>
+        <p:cNvPr id="1" name="">
+          <a:extLst>
+            <a:ext uri="{FF2B5EF4-FFF2-40B4-BE49-F238E27FC236}">
               <a16:creationId xmlns:a16="http://schemas.microsoft.com/office/drawing/2014/main" id="{65F13ACE-31D5-F143-8080-A733AC5BE24C}"/>
             </a:ext>
           </a:extLst>
@@ -13436,7 +14118,7 @@
 </p:sld>
 </file>
 
-<file path=ppt/slides/slide4.xml><?xml version="1.0" encoding="utf-8"?>
+<file path=ppt/slides/slide5.xml><?xml version="1.0" encoding="utf-8"?>
 <p:sld xmlns:a="http://schemas.openxmlformats.org/drawingml/2006/main" xmlns:r="http://schemas.openxmlformats.org/officeDocument/2006/relationships" xmlns:p="http://schemas.openxmlformats.org/presentationml/2006/main">
   <p:cSld>
     <p:spTree>
@@ -13971,7 +14653,7 @@
 </p:sld>
 </file>
 
-<file path=ppt/slides/slide5.xml><?xml version="1.0" encoding="utf-8"?>
+<file path=ppt/slides/slide6.xml><?xml version="1.0" encoding="utf-8"?>
 <p:sld xmlns:a="http://schemas.openxmlformats.org/drawingml/2006/main" xmlns:r="http://schemas.openxmlformats.org/officeDocument/2006/relationships" xmlns:p="http://schemas.openxmlformats.org/presentationml/2006/main">
   <p:cSld>
     <p:spTree>
@@ -15541,7 +16223,7 @@
 </p:sld>
 </file>
 
-<file path=ppt/slides/slide6.xml><?xml version="1.0" encoding="utf-8"?>
+<file path=ppt/slides/slide7.xml><?xml version="1.0" encoding="utf-8"?>
 <p:sld xmlns:a="http://schemas.openxmlformats.org/drawingml/2006/main" xmlns:r="http://schemas.openxmlformats.org/officeDocument/2006/relationships" xmlns:p="http://schemas.openxmlformats.org/presentationml/2006/main">
   <p:cSld>
     <p:spTree>
@@ -16284,7 +16966,7 @@
 </p:sld>
 </file>
 
-<file path=ppt/slides/slide7.xml><?xml version="1.0" encoding="utf-8"?>
+<file path=ppt/slides/slide8.xml><?xml version="1.0" encoding="utf-8"?>
 <p:sld xmlns:a="http://schemas.openxmlformats.org/drawingml/2006/main" xmlns:r="http://schemas.openxmlformats.org/officeDocument/2006/relationships" xmlns:p="http://schemas.openxmlformats.org/presentationml/2006/main">
   <p:cSld>
     <p:spTree>
@@ -17107,7 +17789,7 @@
 </p:sld>
 </file>
 
-<file path=ppt/slides/slide8.xml><?xml version="1.0" encoding="utf-8"?>
+<file path=ppt/slides/slide9.xml><?xml version="1.0" encoding="utf-8"?>
 <p:sld xmlns:a="http://schemas.openxmlformats.org/drawingml/2006/main" xmlns:r="http://schemas.openxmlformats.org/officeDocument/2006/relationships" xmlns:p="http://schemas.openxmlformats.org/presentationml/2006/main">
   <p:cSld>
     <p:spTree>
@@ -17344,310 +18026,6 @@
     <p:extLst>
       <p:ext uri="{BB962C8B-B14F-4D97-AF65-F5344CB8AC3E}">
         <p14:creationId xmlns:p14="http://schemas.microsoft.com/office/powerpoint/2010/main" val="2893798229"/>
-      </p:ext>
-    </p:extLst>
-  </p:cSld>
-  <p:clrMapOvr>
-    <a:masterClrMapping/>
-  </p:clrMapOvr>
-</p:sld>
-</file>
-
-<file path=ppt/slides/slide9.xml><?xml version="1.0" encoding="utf-8"?>
-<p:sld xmlns:a="http://schemas.openxmlformats.org/drawingml/2006/main" xmlns:r="http://schemas.openxmlformats.org/officeDocument/2006/relationships" xmlns:p="http://schemas.openxmlformats.org/presentationml/2006/main">
-  <p:cSld>
-    <p:spTree>
-      <p:nvGrpSpPr>
-        <p:cNvPr id="1" name="">
-          <a:extLst>
-            <a:ext uri="{FF2B5EF4-FFF2-40B4-BE49-F238E27FC236}">
-              <a16:creationId xmlns:a16="http://schemas.microsoft.com/office/drawing/2014/main" id="{AEE4816B-775E-6C7A-EAC8-78523DF35E37}"/>
-            </a:ext>
-          </a:extLst>
-        </p:cNvPr>
-        <p:cNvGrpSpPr/>
-        <p:nvPr/>
-      </p:nvGrpSpPr>
-      <p:grpSpPr>
-        <a:xfrm>
-          <a:off x="0" y="0"/>
-          <a:ext cx="0" cy="0"/>
-          <a:chOff x="0" y="0"/>
-          <a:chExt cx="0" cy="0"/>
-        </a:xfrm>
-      </p:grpSpPr>
-      <p:sp>
-        <p:nvSpPr>
-          <p:cNvPr id="2" name="Título 1">
-            <a:extLst>
-              <a:ext uri="{FF2B5EF4-FFF2-40B4-BE49-F238E27FC236}">
-                <a16:creationId xmlns:a16="http://schemas.microsoft.com/office/drawing/2014/main" id="{115526D0-1CBE-5F70-4334-F5EDB325A2A6}"/>
-              </a:ext>
-            </a:extLst>
-          </p:cNvPr>
-          <p:cNvSpPr>
-            <a:spLocks noGrp="1"/>
-          </p:cNvSpPr>
-          <p:nvPr>
-            <p:ph type="title"/>
-          </p:nvPr>
-        </p:nvSpPr>
-        <p:spPr>
-          <a:xfrm>
-            <a:off x="620313" y="193100"/>
-            <a:ext cx="10515600" cy="1325563"/>
-          </a:xfrm>
-        </p:spPr>
-        <p:txBody>
-          <a:bodyPr>
-            <a:noAutofit/>
-          </a:bodyPr>
-          <a:lstStyle/>
-          <a:p>
-            <a:r>
-              <a:rPr lang="es-MX" sz="3600" b="1" i="1" dirty="0"/>
-              <a:t>¿Qué pasaría si solo usamos </a:t>
-            </a:r>
-            <a:r>
-              <a:rPr lang="es-MX" sz="3600" b="1" i="1" dirty="0" err="1"/>
-              <a:t>term</a:t>
-            </a:r>
-            <a:r>
-              <a:rPr lang="es-MX" sz="3600" b="1" i="1" dirty="0"/>
-              <a:t> base?</a:t>
-            </a:r>
-            <a:endParaRPr lang="es-CL" sz="3600" b="1" i="1" dirty="0"/>
-          </a:p>
-        </p:txBody>
-      </p:sp>
-      <p:pic>
-        <p:nvPicPr>
-          <p:cNvPr id="4" name="Picture 2" descr="Duoc UC - Learn Chile">
-            <a:extLst>
-              <a:ext uri="{FF2B5EF4-FFF2-40B4-BE49-F238E27FC236}">
-                <a16:creationId xmlns:a16="http://schemas.microsoft.com/office/drawing/2014/main" id="{E7182D9E-587C-E442-9CD7-8901BA3B424C}"/>
-              </a:ext>
-            </a:extLst>
-          </p:cNvPr>
-          <p:cNvPicPr>
-            <a:picLocks noChangeAspect="1" noChangeArrowheads="1"/>
-          </p:cNvPicPr>
-          <p:nvPr/>
-        </p:nvPicPr>
-        <p:blipFill>
-          <a:blip r:embed="rId3">
-            <a:extLst>
-              <a:ext uri="{28A0092B-C50C-407E-A947-70E740481C1C}">
-                <a14:useLocalDpi xmlns:a14="http://schemas.microsoft.com/office/drawing/2010/main" val="0"/>
-              </a:ext>
-            </a:extLst>
-          </a:blip>
-          <a:srcRect/>
-          <a:stretch>
-            <a:fillRect/>
-          </a:stretch>
-        </p:blipFill>
-        <p:spPr bwMode="auto">
-          <a:xfrm>
-            <a:off x="11135913" y="30480"/>
-            <a:ext cx="974807" cy="825402"/>
-          </a:xfrm>
-          <a:prstGeom prst="rect">
-            <a:avLst/>
-          </a:prstGeom>
-          <a:noFill/>
-          <a:extLst>
-            <a:ext uri="{909E8E84-426E-40DD-AFC4-6F175D3DCCD1}">
-              <a14:hiddenFill xmlns:a14="http://schemas.microsoft.com/office/drawing/2010/main">
-                <a:solidFill>
-                  <a:srgbClr val="FFFFFF"/>
-                </a:solidFill>
-              </a14:hiddenFill>
-            </a:ext>
-          </a:extLst>
-        </p:spPr>
-      </p:pic>
-      <p:pic>
-        <p:nvPicPr>
-          <p:cNvPr id="3" name="Gráfico 2" descr="Perfil de hombre">
-            <a:extLst>
-              <a:ext uri="{FF2B5EF4-FFF2-40B4-BE49-F238E27FC236}">
-                <a16:creationId xmlns:a16="http://schemas.microsoft.com/office/drawing/2014/main" id="{E89C2753-8B47-1868-1B6A-719CCA43DFB7}"/>
-              </a:ext>
-            </a:extLst>
-          </p:cNvPr>
-          <p:cNvPicPr>
-            <a:picLocks noChangeAspect="1"/>
-          </p:cNvPicPr>
-          <p:nvPr/>
-        </p:nvPicPr>
-        <p:blipFill>
-          <a:blip r:embed="rId4">
-            <a:extLst>
-              <a:ext uri="{96DAC541-7B7A-43D3-8B79-37D633B846F1}">
-                <asvg:svgBlip xmlns:asvg="http://schemas.microsoft.com/office/drawing/2016/SVG/main" r:embed="rId5"/>
-              </a:ext>
-            </a:extLst>
-          </a:blip>
-          <a:stretch>
-            <a:fillRect/>
-          </a:stretch>
-        </p:blipFill>
-        <p:spPr>
-          <a:xfrm>
-            <a:off x="2860080" y="2986949"/>
-            <a:ext cx="914400" cy="914400"/>
-          </a:xfrm>
-          <a:prstGeom prst="rect">
-            <a:avLst/>
-          </a:prstGeom>
-        </p:spPr>
-      </p:pic>
-      <p:sp>
-        <p:nvSpPr>
-          <p:cNvPr id="5" name="CuadroTexto 4">
-            <a:extLst>
-              <a:ext uri="{FF2B5EF4-FFF2-40B4-BE49-F238E27FC236}">
-                <a16:creationId xmlns:a16="http://schemas.microsoft.com/office/drawing/2014/main" id="{345B2BE2-5D0A-636D-9EEE-F0A9FA261E8E}"/>
-              </a:ext>
-            </a:extLst>
-          </p:cNvPr>
-          <p:cNvSpPr txBox="1"/>
-          <p:nvPr/>
-        </p:nvSpPr>
-        <p:spPr>
-          <a:xfrm>
-            <a:off x="1643229" y="2802283"/>
-            <a:ext cx="6097712" cy="369332"/>
-          </a:xfrm>
-          <a:prstGeom prst="rect">
-            <a:avLst/>
-          </a:prstGeom>
-          <a:noFill/>
-        </p:spPr>
-        <p:txBody>
-          <a:bodyPr wrap="square">
-            <a:spAutoFit/>
-          </a:bodyPr>
-          <a:lstStyle/>
-          <a:p>
-            <a:pPr algn="ctr"/>
-            <a:r>
-              <a:rPr lang="es-MX" b="1" i="1" dirty="0"/>
-              <a:t>Consulta</a:t>
-            </a:r>
-            <a:endParaRPr lang="es-CL" b="1" i="1" dirty="0">
-              <a:solidFill>
-                <a:schemeClr val="tx1"/>
-              </a:solidFill>
-            </a:endParaRPr>
-          </a:p>
-        </p:txBody>
-      </p:sp>
-      <p:cxnSp>
-        <p:nvCxnSpPr>
-          <p:cNvPr id="6" name="Conector recto de flecha 5">
-            <a:extLst>
-              <a:ext uri="{FF2B5EF4-FFF2-40B4-BE49-F238E27FC236}">
-                <a16:creationId xmlns:a16="http://schemas.microsoft.com/office/drawing/2014/main" id="{9F2FF5AB-930C-3D9B-1049-0A25B96DF560}"/>
-              </a:ext>
-            </a:extLst>
-          </p:cNvPr>
-          <p:cNvCxnSpPr/>
-          <p:nvPr/>
-        </p:nvCxnSpPr>
-        <p:spPr>
-          <a:xfrm>
-            <a:off x="4000511" y="3421491"/>
-            <a:ext cx="1588630" cy="0"/>
-          </a:xfrm>
-          <a:prstGeom prst="straightConnector1">
-            <a:avLst/>
-          </a:prstGeom>
-          <a:ln>
-            <a:solidFill>
-              <a:schemeClr val="tx1"/>
-            </a:solidFill>
-            <a:tailEnd type="triangle"/>
-          </a:ln>
-        </p:spPr>
-        <p:style>
-          <a:lnRef idx="1">
-            <a:schemeClr val="accent1"/>
-          </a:lnRef>
-          <a:fillRef idx="0">
-            <a:schemeClr val="accent1"/>
-          </a:fillRef>
-          <a:effectRef idx="0">
-            <a:schemeClr val="accent1"/>
-          </a:effectRef>
-          <a:fontRef idx="minor">
-            <a:schemeClr val="tx1"/>
-          </a:fontRef>
-        </p:style>
-      </p:cxnSp>
-      <p:sp>
-        <p:nvSpPr>
-          <p:cNvPr id="8" name="Cilindro 7">
-            <a:extLst>
-              <a:ext uri="{FF2B5EF4-FFF2-40B4-BE49-F238E27FC236}">
-                <a16:creationId xmlns:a16="http://schemas.microsoft.com/office/drawing/2014/main" id="{C396DD47-B68D-1097-3688-56489898C3E4}"/>
-              </a:ext>
-            </a:extLst>
-          </p:cNvPr>
-          <p:cNvSpPr/>
-          <p:nvPr/>
-        </p:nvSpPr>
-        <p:spPr>
-          <a:xfrm>
-            <a:off x="5878113" y="2650929"/>
-            <a:ext cx="1489753" cy="1541124"/>
-          </a:xfrm>
-          <a:prstGeom prst="can">
-            <a:avLst/>
-          </a:prstGeom>
-        </p:spPr>
-        <p:style>
-          <a:lnRef idx="2">
-            <a:schemeClr val="accent1">
-              <a:shade val="15000"/>
-            </a:schemeClr>
-          </a:lnRef>
-          <a:fillRef idx="1">
-            <a:schemeClr val="accent1"/>
-          </a:fillRef>
-          <a:effectRef idx="0">
-            <a:schemeClr val="accent1"/>
-          </a:effectRef>
-          <a:fontRef idx="minor">
-            <a:schemeClr val="lt1"/>
-          </a:fontRef>
-        </p:style>
-        <p:txBody>
-          <a:bodyPr rtlCol="0" anchor="ctr"/>
-          <a:lstStyle/>
-          <a:p>
-            <a:pPr algn="ctr"/>
-            <a:r>
-              <a:rPr lang="es-MX" dirty="0" err="1"/>
-              <a:t>External</a:t>
-            </a:r>
-            <a:r>
-              <a:rPr lang="es-MX" dirty="0"/>
-              <a:t> </a:t>
-            </a:r>
-            <a:r>
-              <a:rPr lang="es-MX" dirty="0" err="1"/>
-              <a:t>Memory</a:t>
-            </a:r>
-            <a:endParaRPr lang="es-CL" dirty="0"/>
-          </a:p>
-        </p:txBody>
-      </p:sp>
-    </p:spTree>
-    <p:extLst>
-      <p:ext uri="{BB962C8B-B14F-4D97-AF65-F5344CB8AC3E}">
-        <p14:creationId xmlns:p14="http://schemas.microsoft.com/office/powerpoint/2010/main" val="61365135"/>
       </p:ext>
     </p:extLst>
   </p:cSld>
